--- a/docs/appointment_agent_interview_deck.pptx
+++ b/docs/appointment_agent_interview_deck.pptx
@@ -20,6 +20,16 @@
     <p:sldId id="268" r:id="rId19"/>
     <p:sldId id="269" r:id="rId20"/>
     <p:sldId id="270" r:id="rId21"/>
+    <p:sldId id="271" r:id="rId22"/>
+    <p:sldId id="272" r:id="rId23"/>
+    <p:sldId id="273" r:id="rId24"/>
+    <p:sldId id="274" r:id="rId25"/>
+    <p:sldId id="275" r:id="rId26"/>
+    <p:sldId id="276" r:id="rId27"/>
+    <p:sldId id="277" r:id="rId28"/>
+    <p:sldId id="278" r:id="rId29"/>
+    <p:sldId id="279" r:id="rId30"/>
+    <p:sldId id="280" r:id="rId31"/>
   </p:sldIdLst>
   <p:sldSz cx="12191695" cy="6858000" type="screen4x3"/>
   <p:notesSz cx="6858000" cy="9144000"/>
@@ -3161,8 +3171,8 @@
         </p:nvSpPr>
         <p:spPr>
           <a:xfrm>
-            <a:off x="594360" y="502920"/>
-            <a:ext cx="10789920" cy="731520"/>
+            <a:off x="594360" y="411480"/>
+            <a:ext cx="10881360" cy="685800"/>
           </a:xfrm>
           <a:prstGeom prst="rect">
             <a:avLst/>
@@ -3176,14 +3186,14 @@
           <a:lstStyle/>
           <a:p>
             <a:pPr>
-              <a:defRPr sz="3400" b="1">
+              <a:defRPr sz="3100" b="1">
                 <a:solidFill>
                   <a:srgbClr val="172033"/>
                 </a:solidFill>
               </a:defRPr>
             </a:pPr>
             <a:r>
-              <a:t>Appointment Scheduling AI Agent</a:t>
+              <a:t>Title</a:t>
             </a:r>
           </a:p>
         </p:txBody>
@@ -3196,8 +3206,8 @@
         </p:nvSpPr>
         <p:spPr>
           <a:xfrm>
-            <a:off x="777240" y="1508760"/>
-            <a:ext cx="10607040" cy="4480560"/>
+            <a:off x="777240" y="1234440"/>
+            <a:ext cx="10607040" cy="4800600"/>
           </a:xfrm>
           <a:prstGeom prst="rect">
             <a:avLst/>
@@ -3205,38 +3215,38 @@
           <a:noFill/>
         </p:spPr>
         <p:txBody>
-          <a:bodyPr wrap="none">
+          <a:bodyPr wrap="square">
             <a:spAutoFit/>
           </a:bodyPr>
           <a:lstStyle/>
           <a:p>
             <a:pPr>
               <a:spcAft>
-                <a:spcPts val="1200"/>
-              </a:spcAft>
-              <a:defRPr sz="1900">
+                <a:spcPts val="700"/>
+              </a:spcAft>
+              <a:defRPr sz="2200">
                 <a:solidFill>
                   <a:srgbClr val="172033"/>
                 </a:solidFill>
               </a:defRPr>
             </a:pPr>
             <a:r>
+              <a:t>Appointment Scheduling AI Agent</a:t>
+            </a:r>
+          </a:p>
+          <a:p>
+            <a:pPr>
+              <a:spcAft>
+                <a:spcPts val="700"/>
+              </a:spcAft>
+              <a:defRPr sz="2200">
+                <a:solidFill>
+                  <a:srgbClr val="172033"/>
+                </a:solidFill>
+              </a:defRPr>
+            </a:pPr>
+            <a:r>
               <a:t>Text and voice assistant for booking, rescheduling, and canceling demo appointments.</a:t>
-            </a:r>
-          </a:p>
-          <a:p>
-            <a:pPr>
-              <a:spcAft>
-                <a:spcPts val="1200"/>
-              </a:spcAft>
-              <a:defRPr sz="1900">
-                <a:solidFill>
-                  <a:srgbClr val="586376"/>
-                </a:solidFill>
-              </a:defRPr>
-            </a:pPr>
-            <a:r>
-              <a:t>Built with OpenAI, FastAPI, Pydantic, and deterministic scheduling tools.</a:t>
             </a:r>
           </a:p>
         </p:txBody>
@@ -3353,8 +3363,8 @@
         </p:nvSpPr>
         <p:spPr>
           <a:xfrm>
-            <a:off x="594360" y="502920"/>
-            <a:ext cx="10789920" cy="731520"/>
+            <a:off x="594360" y="411480"/>
+            <a:ext cx="10881360" cy="685800"/>
           </a:xfrm>
           <a:prstGeom prst="rect">
             <a:avLst/>
@@ -3368,14 +3378,14 @@
           <a:lstStyle/>
           <a:p>
             <a:pPr>
-              <a:defRPr sz="3400" b="1">
+              <a:defRPr sz="3100" b="1">
                 <a:solidFill>
                   <a:srgbClr val="172033"/>
                 </a:solidFill>
               </a:defRPr>
             </a:pPr>
             <a:r>
-              <a:t>Coding Interview Framing</a:t>
+              <a:t>Voice Experience</a:t>
             </a:r>
           </a:p>
         </p:txBody>
@@ -3388,8 +3398,8 @@
         </p:nvSpPr>
         <p:spPr>
           <a:xfrm>
-            <a:off x="777240" y="1508760"/>
-            <a:ext cx="10607040" cy="4480560"/>
+            <a:off x="777240" y="1234440"/>
+            <a:ext cx="10607040" cy="4800600"/>
           </a:xfrm>
           <a:prstGeom prst="rect">
             <a:avLst/>
@@ -3397,98 +3407,98 @@
           <a:noFill/>
         </p:spPr>
         <p:txBody>
-          <a:bodyPr wrap="none">
+          <a:bodyPr wrap="square">
             <a:spAutoFit/>
           </a:bodyPr>
           <a:lstStyle/>
           <a:p>
             <a:pPr>
               <a:spcAft>
-                <a:spcPts val="1200"/>
-              </a:spcAft>
-              <a:defRPr sz="2200">
-                <a:solidFill>
-                  <a:srgbClr val="586376"/>
-                </a:solidFill>
-              </a:defRPr>
-            </a:pPr>
-            <a:r>
-              <a:t>Clarify requirements first</a:t>
-            </a:r>
-          </a:p>
-          <a:p>
-            <a:pPr>
-              <a:spcAft>
-                <a:spcPts val="1200"/>
-              </a:spcAft>
-              <a:defRPr sz="2200">
-                <a:solidFill>
-                  <a:srgbClr val="586376"/>
-                </a:solidFill>
-              </a:defRPr>
-            </a:pPr>
-            <a:r>
-              <a:t>State assumptions</a:t>
-            </a:r>
-          </a:p>
-          <a:p>
-            <a:pPr>
-              <a:spcAft>
-                <a:spcPts val="1200"/>
-              </a:spcAft>
-              <a:defRPr sz="2200">
-                <a:solidFill>
-                  <a:srgbClr val="586376"/>
-                </a:solidFill>
-              </a:defRPr>
-            </a:pPr>
-            <a:r>
-              <a:t>Keep implementation readable</a:t>
-            </a:r>
-          </a:p>
-          <a:p>
-            <a:pPr>
-              <a:spcAft>
-                <a:spcPts val="1200"/>
-              </a:spcAft>
-              <a:defRPr sz="2200">
-                <a:solidFill>
-                  <a:srgbClr val="586376"/>
-                </a:solidFill>
-              </a:defRPr>
-            </a:pPr>
-            <a:r>
-              <a:t>Explain tradeoffs</a:t>
-            </a:r>
-          </a:p>
-          <a:p>
-            <a:pPr>
-              <a:spcAft>
-                <a:spcPts val="1200"/>
-              </a:spcAft>
-              <a:defRPr sz="2200">
-                <a:solidFill>
-                  <a:srgbClr val="586376"/>
-                </a:solidFill>
-              </a:defRPr>
-            </a:pPr>
-            <a:r>
-              <a:t>Test critical invariants</a:t>
-            </a:r>
-          </a:p>
-          <a:p>
-            <a:pPr>
-              <a:spcAft>
-                <a:spcPts val="1200"/>
-              </a:spcAft>
-              <a:defRPr sz="2200">
-                <a:solidFill>
-                  <a:srgbClr val="586376"/>
-                </a:solidFill>
-              </a:defRPr>
-            </a:pPr>
-            <a:r>
-              <a:t>Debug from observable signals</a:t>
+                <a:spcPts val="700"/>
+              </a:spcAft>
+              <a:defRPr sz="2100">
+                <a:solidFill>
+                  <a:srgbClr val="586376"/>
+                </a:solidFill>
+              </a:defRPr>
+            </a:pPr>
+            <a:r>
+              <a:t>Hold-to-talk microphone input</a:t>
+            </a:r>
+          </a:p>
+          <a:p>
+            <a:pPr>
+              <a:spcAft>
+                <a:spcPts val="700"/>
+              </a:spcAft>
+              <a:defRPr sz="2100">
+                <a:solidFill>
+                  <a:srgbClr val="586376"/>
+                </a:solidFill>
+              </a:defRPr>
+            </a:pPr>
+            <a:r>
+              <a:t>Audio sent to OpenAI transcription with English language setting</a:t>
+            </a:r>
+          </a:p>
+          <a:p>
+            <a:pPr>
+              <a:spcAft>
+                <a:spcPts val="700"/>
+              </a:spcAft>
+              <a:defRPr sz="2100">
+                <a:solidFill>
+                  <a:srgbClr val="586376"/>
+                </a:solidFill>
+              </a:defRPr>
+            </a:pPr>
+            <a:r>
+              <a:t>Assistant response shown in chat</a:t>
+            </a:r>
+          </a:p>
+          <a:p>
+            <a:pPr>
+              <a:spcAft>
+                <a:spcPts val="700"/>
+              </a:spcAft>
+              <a:defRPr sz="2100">
+                <a:solidFill>
+                  <a:srgbClr val="586376"/>
+                </a:solidFill>
+              </a:defRPr>
+            </a:pPr>
+            <a:r>
+              <a:t>OpenAI speech output</a:t>
+            </a:r>
+          </a:p>
+          <a:p>
+            <a:pPr>
+              <a:spcAft>
+                <a:spcPts val="700"/>
+              </a:spcAft>
+              <a:defRPr sz="2100">
+                <a:solidFill>
+                  <a:srgbClr val="586376"/>
+                </a:solidFill>
+              </a:defRPr>
+            </a:pPr>
+            <a:r>
+              <a:t>Interrupt button stops playback</a:t>
+            </a:r>
+          </a:p>
+          <a:p>
+            <a:pPr>
+              <a:spcAft>
+                <a:spcPts val="700"/>
+              </a:spcAft>
+              <a:defRPr sz="2100">
+                <a:solidFill>
+                  <a:srgbClr val="586376"/>
+                </a:solidFill>
+              </a:defRPr>
+            </a:pPr>
+            <a:r>
+              <a:t>Voice upload retries once after transient fetch failure</a:t>
             </a:r>
           </a:p>
         </p:txBody>
@@ -3605,8 +3615,8 @@
         </p:nvSpPr>
         <p:spPr>
           <a:xfrm>
-            <a:off x="594360" y="502920"/>
-            <a:ext cx="10789920" cy="731520"/>
+            <a:off x="594360" y="411480"/>
+            <a:ext cx="10881360" cy="685800"/>
           </a:xfrm>
           <a:prstGeom prst="rect">
             <a:avLst/>
@@ -3620,14 +3630,14 @@
           <a:lstStyle/>
           <a:p>
             <a:pPr>
-              <a:defRPr sz="3400" b="1">
+              <a:defRPr sz="3100" b="1">
                 <a:solidFill>
                   <a:srgbClr val="172033"/>
                 </a:solidFill>
               </a:defRPr>
             </a:pPr>
             <a:r>
-              <a:t>System Design Framing</a:t>
+              <a:t>Current Streaming Design</a:t>
             </a:r>
           </a:p>
         </p:txBody>
@@ -3640,8 +3650,8 @@
         </p:nvSpPr>
         <p:spPr>
           <a:xfrm>
-            <a:off x="777240" y="1508760"/>
-            <a:ext cx="10607040" cy="4480560"/>
+            <a:off x="777240" y="1234440"/>
+            <a:ext cx="10607040" cy="4800600"/>
           </a:xfrm>
           <a:prstGeom prst="rect">
             <a:avLst/>
@@ -3649,113 +3659,53 @@
           <a:noFill/>
         </p:spPr>
         <p:txBody>
-          <a:bodyPr wrap="none">
+          <a:bodyPr wrap="square">
             <a:spAutoFit/>
           </a:bodyPr>
           <a:lstStyle/>
           <a:p>
             <a:pPr>
               <a:spcAft>
-                <a:spcPts val="1200"/>
+                <a:spcPts val="700"/>
               </a:spcAft>
               <a:defRPr sz="2200">
                 <a:solidFill>
-                  <a:srgbClr val="586376"/>
-                </a:solidFill>
-              </a:defRPr>
-            </a:pPr>
-            <a:r>
-              <a:t>Replace in-memory store with scheduling backend</a:t>
-            </a:r>
-          </a:p>
-          <a:p>
-            <a:pPr>
-              <a:spcAft>
-                <a:spcPts val="1200"/>
+                  <a:srgbClr val="172033"/>
+                </a:solidFill>
+              </a:defRPr>
+            </a:pPr>
+            <a:r>
+              <a:t>The browser uses `POST /chat/stream` to render assistant text progressively.</a:t>
+            </a:r>
+          </a:p>
+          <a:p>
+            <a:pPr>
+              <a:spcAft>
+                <a:spcPts val="700"/>
               </a:spcAft>
               <a:defRPr sz="2200">
                 <a:solidFill>
-                  <a:srgbClr val="586376"/>
-                </a:solidFill>
-              </a:defRPr>
-            </a:pPr>
-            <a:r>
-              <a:t>Add authentication</a:t>
-            </a:r>
-          </a:p>
-          <a:p>
-            <a:pPr>
-              <a:spcAft>
-                <a:spcPts val="1200"/>
+                  <a:srgbClr val="172033"/>
+                </a:solidFill>
+              </a:defRPr>
+            </a:pPr>
+            <a:r>
+              <a:t>Current implementation streams the completed assistant response after tool execution. This keeps tool mutation deterministic and easy to explain.</a:t>
+            </a:r>
+          </a:p>
+          <a:p>
+            <a:pPr>
+              <a:spcAft>
+                <a:spcPts val="700"/>
               </a:spcAft>
               <a:defRPr sz="2200">
                 <a:solidFill>
-                  <a:srgbClr val="586376"/>
-                </a:solidFill>
-              </a:defRPr>
-            </a:pPr>
-            <a:r>
-              <a:t>Add audit logging</a:t>
-            </a:r>
-          </a:p>
-          <a:p>
-            <a:pPr>
-              <a:spcAft>
-                <a:spcPts val="1200"/>
-              </a:spcAft>
-              <a:defRPr sz="2200">
-                <a:solidFill>
-                  <a:srgbClr val="586376"/>
-                </a:solidFill>
-              </a:defRPr>
-            </a:pPr>
-            <a:r>
-              <a:t>Add observability</a:t>
-            </a:r>
-          </a:p>
-          <a:p>
-            <a:pPr>
-              <a:spcAft>
-                <a:spcPts val="1200"/>
-              </a:spcAft>
-              <a:defRPr sz="2200">
-                <a:solidFill>
-                  <a:srgbClr val="586376"/>
-                </a:solidFill>
-              </a:defRPr>
-            </a:pPr>
-            <a:r>
-              <a:t>Add human handoff</a:t>
-            </a:r>
-          </a:p>
-          <a:p>
-            <a:pPr>
-              <a:spcAft>
-                <a:spcPts val="1200"/>
-              </a:spcAft>
-              <a:defRPr sz="2200">
-                <a:solidFill>
-                  <a:srgbClr val="586376"/>
-                </a:solidFill>
-              </a:defRPr>
-            </a:pPr>
-            <a:r>
-              <a:t>Add streaming voice transport</a:t>
-            </a:r>
-          </a:p>
-          <a:p>
-            <a:pPr>
-              <a:spcAft>
-                <a:spcPts val="1200"/>
-              </a:spcAft>
-              <a:defRPr sz="2200">
-                <a:solidFill>
-                  <a:srgbClr val="586376"/>
-                </a:solidFill>
-              </a:defRPr>
-            </a:pPr>
-            <a:r>
-              <a:t>Add retry and timeout policies</a:t>
+                  <a:srgbClr val="172033"/>
+                </a:solidFill>
+              </a:defRPr>
+            </a:pPr>
+            <a:r>
+              <a:t>Production upgrade: token streaming with explicit phases for thinking, tool execution, and final answer.</a:t>
             </a:r>
           </a:p>
         </p:txBody>
@@ -3872,8 +3822,8 @@
         </p:nvSpPr>
         <p:spPr>
           <a:xfrm>
-            <a:off x="594360" y="502920"/>
-            <a:ext cx="10789920" cy="731520"/>
+            <a:off x="594360" y="411480"/>
+            <a:ext cx="10881360" cy="685800"/>
           </a:xfrm>
           <a:prstGeom prst="rect">
             <a:avLst/>
@@ -3887,14 +3837,14 @@
           <a:lstStyle/>
           <a:p>
             <a:pPr>
-              <a:defRPr sz="3400" b="1">
+              <a:defRPr sz="2700" b="1">
                 <a:solidFill>
                   <a:srgbClr val="172033"/>
                 </a:solidFill>
               </a:defRPr>
             </a:pPr>
             <a:r>
-              <a:t>Demo Walkthrough</a:t>
+              <a:t>Production Target Architecture</a:t>
             </a:r>
           </a:p>
         </p:txBody>
@@ -3907,8 +3857,8 @@
         </p:nvSpPr>
         <p:spPr>
           <a:xfrm>
-            <a:off x="777240" y="1508760"/>
-            <a:ext cx="10607040" cy="4480560"/>
+            <a:off x="777240" y="1234440"/>
+            <a:ext cx="10607040" cy="4800600"/>
           </a:xfrm>
           <a:prstGeom prst="rect">
             <a:avLst/>
@@ -3916,128 +3866,183 @@
           <a:noFill/>
         </p:spPr>
         <p:txBody>
-          <a:bodyPr wrap="none">
+          <a:bodyPr wrap="square">
             <a:spAutoFit/>
           </a:bodyPr>
           <a:lstStyle/>
           <a:p>
             <a:pPr>
               <a:spcAft>
-                <a:spcPts val="1200"/>
-              </a:spcAft>
-              <a:defRPr sz="2200">
-                <a:solidFill>
-                  <a:srgbClr val="586376"/>
-                </a:solidFill>
-              </a:defRPr>
-            </a:pPr>
-            <a:r>
-              <a:t>Open browser UI</a:t>
-            </a:r>
-          </a:p>
-          <a:p>
-            <a:pPr>
-              <a:spcAft>
-                <a:spcPts val="1200"/>
-              </a:spcAft>
-              <a:defRPr sz="2200">
-                <a:solidFill>
-                  <a:srgbClr val="586376"/>
-                </a:solidFill>
-              </a:defRPr>
-            </a:pPr>
-            <a:r>
-              <a:t>Ask for an appointment</a:t>
-            </a:r>
-          </a:p>
-          <a:p>
-            <a:pPr>
-              <a:spcAft>
-                <a:spcPts val="1200"/>
-              </a:spcAft>
-              <a:defRPr sz="2200">
-                <a:solidFill>
-                  <a:srgbClr val="586376"/>
-                </a:solidFill>
-              </a:defRPr>
-            </a:pPr>
-            <a:r>
-              <a:t>Search slots</a:t>
-            </a:r>
-          </a:p>
-          <a:p>
-            <a:pPr>
-              <a:spcAft>
-                <a:spcPts val="1200"/>
-              </a:spcAft>
-              <a:defRPr sz="2200">
-                <a:solidFill>
-                  <a:srgbClr val="586376"/>
-                </a:solidFill>
-              </a:defRPr>
-            </a:pPr>
-            <a:r>
-              <a:t>Hold selected slot</a:t>
-            </a:r>
-          </a:p>
-          <a:p>
-            <a:pPr>
-              <a:spcAft>
-                <a:spcPts val="1200"/>
-              </a:spcAft>
-              <a:defRPr sz="2200">
-                <a:solidFill>
-                  <a:srgbClr val="586376"/>
-                </a:solidFill>
-              </a:defRPr>
-            </a:pPr>
-            <a:r>
-              <a:t>Confirm patient details</a:t>
-            </a:r>
-          </a:p>
-          <a:p>
-            <a:pPr>
-              <a:spcAft>
-                <a:spcPts val="1200"/>
-              </a:spcAft>
-              <a:defRPr sz="2200">
-                <a:solidFill>
-                  <a:srgbClr val="586376"/>
-                </a:solidFill>
-              </a:defRPr>
-            </a:pPr>
-            <a:r>
-              <a:t>Book appointment</a:t>
-            </a:r>
-          </a:p>
-          <a:p>
-            <a:pPr>
-              <a:spcAft>
-                <a:spcPts val="1200"/>
-              </a:spcAft>
-              <a:defRPr sz="2200">
-                <a:solidFill>
-                  <a:srgbClr val="586376"/>
-                </a:solidFill>
-              </a:defRPr>
-            </a:pPr>
-            <a:r>
-              <a:t>Show tool trace</a:t>
-            </a:r>
-          </a:p>
-          <a:p>
-            <a:pPr>
-              <a:spcAft>
-                <a:spcPts val="1200"/>
-              </a:spcAft>
-              <a:defRPr sz="2200">
-                <a:solidFill>
-                  <a:srgbClr val="586376"/>
-                </a:solidFill>
-              </a:defRPr>
-            </a:pPr>
-            <a:r>
-              <a:t>Test emergency response</a:t>
+                <a:spcPts val="700"/>
+              </a:spcAft>
+              <a:defRPr sz="1500">
+                <a:solidFill>
+                  <a:srgbClr val="172033"/>
+                </a:solidFill>
+                <a:latin typeface="Courier New"/>
+              </a:defRPr>
+            </a:pPr>
+            <a:r>
+              <a:t>Client apps</a:t>
+            </a:r>
+          </a:p>
+          <a:p>
+            <a:pPr>
+              <a:spcAft>
+                <a:spcPts val="700"/>
+              </a:spcAft>
+              <a:defRPr sz="1500">
+                <a:solidFill>
+                  <a:srgbClr val="172033"/>
+                </a:solidFill>
+                <a:latin typeface="Courier New"/>
+              </a:defRPr>
+            </a:pPr>
+            <a:r>
+              <a:t>-&gt; API gateway</a:t>
+            </a:r>
+          </a:p>
+          <a:p>
+            <a:pPr>
+              <a:spcAft>
+                <a:spcPts val="700"/>
+              </a:spcAft>
+              <a:defRPr sz="1500">
+                <a:solidFill>
+                  <a:srgbClr val="172033"/>
+                </a:solidFill>
+                <a:latin typeface="Courier New"/>
+              </a:defRPr>
+            </a:pPr>
+            <a:r>
+              <a:t>-&gt; Auth and rate limits</a:t>
+            </a:r>
+          </a:p>
+          <a:p>
+            <a:pPr>
+              <a:spcAft>
+                <a:spcPts val="700"/>
+              </a:spcAft>
+              <a:defRPr sz="1500">
+                <a:solidFill>
+                  <a:srgbClr val="172033"/>
+                </a:solidFill>
+                <a:latin typeface="Courier New"/>
+              </a:defRPr>
+            </a:pPr>
+            <a:r>
+              <a:t>-&gt; Chat service</a:t>
+            </a:r>
+          </a:p>
+          <a:p>
+            <a:pPr>
+              <a:spcAft>
+                <a:spcPts val="700"/>
+              </a:spcAft>
+              <a:defRPr sz="1500">
+                <a:solidFill>
+                  <a:srgbClr val="172033"/>
+                </a:solidFill>
+                <a:latin typeface="Courier New"/>
+              </a:defRPr>
+            </a:pPr>
+            <a:r>
+              <a:t>-&gt; Orchestrator workers</a:t>
+            </a:r>
+          </a:p>
+          <a:p>
+            <a:pPr>
+              <a:spcAft>
+                <a:spcPts val="700"/>
+              </a:spcAft>
+              <a:defRPr sz="1500">
+                <a:solidFill>
+                  <a:srgbClr val="172033"/>
+                </a:solidFill>
+                <a:latin typeface="Courier New"/>
+              </a:defRPr>
+            </a:pPr>
+            <a:r>
+              <a:t>-&gt; Tool execution service</a:t>
+            </a:r>
+          </a:p>
+          <a:p>
+            <a:pPr>
+              <a:spcAft>
+                <a:spcPts val="700"/>
+              </a:spcAft>
+              <a:defRPr sz="1500">
+                <a:solidFill>
+                  <a:srgbClr val="172033"/>
+                </a:solidFill>
+                <a:latin typeface="Courier New"/>
+              </a:defRPr>
+            </a:pPr>
+            <a:r>
+              <a:t>-&gt; Scheduling/EHR integration</a:t>
+            </a:r>
+          </a:p>
+          <a:p>
+            <a:pPr>
+              <a:spcAft>
+                <a:spcPts val="700"/>
+              </a:spcAft>
+              <a:defRPr sz="1500">
+                <a:solidFill>
+                  <a:srgbClr val="172033"/>
+                </a:solidFill>
+                <a:latin typeface="Courier New"/>
+              </a:defRPr>
+            </a:pPr>
+            <a:r>
+              <a:t>-&gt; Session store</a:t>
+            </a:r>
+          </a:p>
+          <a:p>
+            <a:pPr>
+              <a:spcAft>
+                <a:spcPts val="700"/>
+              </a:spcAft>
+              <a:defRPr sz="1500">
+                <a:solidFill>
+                  <a:srgbClr val="172033"/>
+                </a:solidFill>
+                <a:latin typeface="Courier New"/>
+              </a:defRPr>
+            </a:pPr>
+            <a:r>
+              <a:t>-&gt; Audit log</a:t>
+            </a:r>
+          </a:p>
+          <a:p>
+            <a:pPr>
+              <a:spcAft>
+                <a:spcPts val="700"/>
+              </a:spcAft>
+              <a:defRPr sz="1500">
+                <a:solidFill>
+                  <a:srgbClr val="172033"/>
+                </a:solidFill>
+                <a:latin typeface="Courier New"/>
+              </a:defRPr>
+            </a:pPr>
+            <a:r>
+              <a:t>-&gt; Observability stack</a:t>
+            </a:r>
+          </a:p>
+          <a:p>
+            <a:pPr>
+              <a:spcAft>
+                <a:spcPts val="700"/>
+              </a:spcAft>
+              <a:defRPr sz="1700">
+                <a:solidFill>
+                  <a:srgbClr val="172033"/>
+                </a:solidFill>
+              </a:defRPr>
+            </a:pPr>
+            <a:r>
+              <a:t>Audio services can be split into STT and TTS workers for better latency isolation.</a:t>
             </a:r>
           </a:p>
         </p:txBody>
@@ -4154,8 +4159,8 @@
         </p:nvSpPr>
         <p:spPr>
           <a:xfrm>
-            <a:off x="594360" y="502920"/>
-            <a:ext cx="10789920" cy="731520"/>
+            <a:off x="594360" y="411480"/>
+            <a:ext cx="10881360" cy="685800"/>
           </a:xfrm>
           <a:prstGeom prst="rect">
             <a:avLst/>
@@ -4169,14 +4174,14 @@
           <a:lstStyle/>
           <a:p>
             <a:pPr>
-              <a:defRPr sz="3400" b="1">
+              <a:defRPr sz="3100" b="1">
                 <a:solidFill>
                   <a:srgbClr val="172033"/>
                 </a:solidFill>
               </a:defRPr>
             </a:pPr>
             <a:r>
-              <a:t>Challenges</a:t>
+              <a:t>Multi-User Scaling</a:t>
             </a:r>
           </a:p>
         </p:txBody>
@@ -4189,8 +4194,8 @@
         </p:nvSpPr>
         <p:spPr>
           <a:xfrm>
-            <a:off x="777240" y="1508760"/>
-            <a:ext cx="10607040" cy="4480560"/>
+            <a:off x="777240" y="1234440"/>
+            <a:ext cx="10607040" cy="4800600"/>
           </a:xfrm>
           <a:prstGeom prst="rect">
             <a:avLst/>
@@ -4198,83 +4203,113 @@
           <a:noFill/>
         </p:spPr>
         <p:txBody>
-          <a:bodyPr wrap="none">
+          <a:bodyPr wrap="square">
             <a:spAutoFit/>
           </a:bodyPr>
           <a:lstStyle/>
           <a:p>
             <a:pPr>
               <a:spcAft>
-                <a:spcPts val="1200"/>
-              </a:spcAft>
-              <a:defRPr sz="2200">
-                <a:solidFill>
-                  <a:srgbClr val="586376"/>
-                </a:solidFill>
-              </a:defRPr>
-            </a:pPr>
-            <a:r>
-              <a:t>Preventing unsafe model actions</a:t>
-            </a:r>
-          </a:p>
-          <a:p>
-            <a:pPr>
-              <a:spcAft>
-                <a:spcPts val="1200"/>
-              </a:spcAft>
-              <a:defRPr sz="2200">
-                <a:solidFill>
-                  <a:srgbClr val="586376"/>
-                </a:solidFill>
-              </a:defRPr>
-            </a:pPr>
-            <a:r>
-              <a:t>Handling partial patient information</a:t>
-            </a:r>
-          </a:p>
-          <a:p>
-            <a:pPr>
-              <a:spcAft>
-                <a:spcPts val="1200"/>
-              </a:spcAft>
-              <a:defRPr sz="2200">
-                <a:solidFill>
-                  <a:srgbClr val="586376"/>
-                </a:solidFill>
-              </a:defRPr>
-            </a:pPr>
-            <a:r>
-              <a:t>Keeping voice responses TTS-friendly</a:t>
-            </a:r>
-          </a:p>
-          <a:p>
-            <a:pPr>
-              <a:spcAft>
-                <a:spcPts val="1200"/>
-              </a:spcAft>
-              <a:defRPr sz="2200">
-                <a:solidFill>
-                  <a:srgbClr val="586376"/>
-                </a:solidFill>
-              </a:defRPr>
-            </a:pPr>
-            <a:r>
-              <a:t>Recovering from transient browser audio failures</a:t>
-            </a:r>
-          </a:p>
-          <a:p>
-            <a:pPr>
-              <a:spcAft>
-                <a:spcPts val="1200"/>
-              </a:spcAft>
-              <a:defRPr sz="2200">
-                <a:solidFill>
-                  <a:srgbClr val="586376"/>
-                </a:solidFill>
-              </a:defRPr>
-            </a:pPr>
-            <a:r>
-              <a:t>Balancing demo simplicity with production realism</a:t>
+                <a:spcPts val="700"/>
+              </a:spcAft>
+              <a:defRPr sz="2100">
+                <a:solidFill>
+                  <a:srgbClr val="586376"/>
+                </a:solidFill>
+              </a:defRPr>
+            </a:pPr>
+            <a:r>
+              <a:t>Make API servers stateless</a:t>
+            </a:r>
+          </a:p>
+          <a:p>
+            <a:pPr>
+              <a:spcAft>
+                <a:spcPts val="700"/>
+              </a:spcAft>
+              <a:defRPr sz="2100">
+                <a:solidFill>
+                  <a:srgbClr val="586376"/>
+                </a:solidFill>
+              </a:defRPr>
+            </a:pPr>
+            <a:r>
+              <a:t>Store sessions in Redis or Postgres</a:t>
+            </a:r>
+          </a:p>
+          <a:p>
+            <a:pPr>
+              <a:spcAft>
+                <a:spcPts val="700"/>
+              </a:spcAft>
+              <a:defRPr sz="2100">
+                <a:solidFill>
+                  <a:srgbClr val="586376"/>
+                </a:solidFill>
+              </a:defRPr>
+            </a:pPr>
+            <a:r>
+              <a:t>Run multiple API replicas behind a load balancer</a:t>
+            </a:r>
+          </a:p>
+          <a:p>
+            <a:pPr>
+              <a:spcAft>
+                <a:spcPts val="700"/>
+              </a:spcAft>
+              <a:defRPr sz="2100">
+                <a:solidFill>
+                  <a:srgbClr val="586376"/>
+                </a:solidFill>
+              </a:defRPr>
+            </a:pPr>
+            <a:r>
+              <a:t>Use worker queues for slow STT, TTS, and external scheduling calls</a:t>
+            </a:r>
+          </a:p>
+          <a:p>
+            <a:pPr>
+              <a:spcAft>
+                <a:spcPts val="700"/>
+              </a:spcAft>
+              <a:defRPr sz="2100">
+                <a:solidFill>
+                  <a:srgbClr val="586376"/>
+                </a:solidFill>
+              </a:defRPr>
+            </a:pPr>
+            <a:r>
+              <a:t>Use connection pools for databases and EHR APIs</a:t>
+            </a:r>
+          </a:p>
+          <a:p>
+            <a:pPr>
+              <a:spcAft>
+                <a:spcPts val="700"/>
+              </a:spcAft>
+              <a:defRPr sz="2100">
+                <a:solidFill>
+                  <a:srgbClr val="586376"/>
+                </a:solidFill>
+              </a:defRPr>
+            </a:pPr>
+            <a:r>
+              <a:t>Partition logs by tenant, user, and session</a:t>
+            </a:r>
+          </a:p>
+          <a:p>
+            <a:pPr>
+              <a:spcAft>
+                <a:spcPts val="700"/>
+              </a:spcAft>
+              <a:defRPr sz="2100">
+                <a:solidFill>
+                  <a:srgbClr val="586376"/>
+                </a:solidFill>
+              </a:defRPr>
+            </a:pPr>
+            <a:r>
+              <a:t>Autoscale on request rate, latency, and queue depth</a:t>
             </a:r>
           </a:p>
         </p:txBody>
@@ -4391,8 +4426,8 @@
         </p:nvSpPr>
         <p:spPr>
           <a:xfrm>
-            <a:off x="594360" y="502920"/>
-            <a:ext cx="10789920" cy="731520"/>
+            <a:off x="594360" y="411480"/>
+            <a:ext cx="10881360" cy="685800"/>
           </a:xfrm>
           <a:prstGeom prst="rect">
             <a:avLst/>
@@ -4406,14 +4441,14 @@
           <a:lstStyle/>
           <a:p>
             <a:pPr>
-              <a:defRPr sz="3400" b="1">
+              <a:defRPr sz="3100" b="1">
                 <a:solidFill>
                   <a:srgbClr val="172033"/>
                 </a:solidFill>
               </a:defRPr>
             </a:pPr>
             <a:r>
-              <a:t>Improvements</a:t>
+              <a:t>Handling Load</a:t>
             </a:r>
           </a:p>
         </p:txBody>
@@ -4426,8 +4461,8 @@
         </p:nvSpPr>
         <p:spPr>
           <a:xfrm>
-            <a:off x="777240" y="1508760"/>
-            <a:ext cx="10607040" cy="4480560"/>
+            <a:off x="777240" y="1234440"/>
+            <a:ext cx="10607040" cy="4800600"/>
           </a:xfrm>
           <a:prstGeom prst="rect">
             <a:avLst/>
@@ -4435,98 +4470,113 @@
           <a:noFill/>
         </p:spPr>
         <p:txBody>
-          <a:bodyPr wrap="none">
+          <a:bodyPr wrap="square">
             <a:spAutoFit/>
           </a:bodyPr>
           <a:lstStyle/>
           <a:p>
             <a:pPr>
               <a:spcAft>
-                <a:spcPts val="1200"/>
-              </a:spcAft>
-              <a:defRPr sz="2200">
-                <a:solidFill>
-                  <a:srgbClr val="586376"/>
-                </a:solidFill>
-              </a:defRPr>
-            </a:pPr>
-            <a:r>
-              <a:t>Real scheduling integration</a:t>
-            </a:r>
-          </a:p>
-          <a:p>
-            <a:pPr>
-              <a:spcAft>
-                <a:spcPts val="1200"/>
-              </a:spcAft>
-              <a:defRPr sz="2200">
-                <a:solidFill>
-                  <a:srgbClr val="586376"/>
-                </a:solidFill>
-              </a:defRPr>
-            </a:pPr>
-            <a:r>
-              <a:t>HIPAA and security review</a:t>
-            </a:r>
-          </a:p>
-          <a:p>
-            <a:pPr>
-              <a:spcAft>
-                <a:spcPts val="1200"/>
-              </a:spcAft>
-              <a:defRPr sz="2200">
-                <a:solidFill>
-                  <a:srgbClr val="586376"/>
-                </a:solidFill>
-              </a:defRPr>
-            </a:pPr>
-            <a:r>
-              <a:t>Persistent sessions</a:t>
-            </a:r>
-          </a:p>
-          <a:p>
-            <a:pPr>
-              <a:spcAft>
-                <a:spcPts val="1200"/>
-              </a:spcAft>
-              <a:defRPr sz="2200">
-                <a:solidFill>
-                  <a:srgbClr val="586376"/>
-                </a:solidFill>
-              </a:defRPr>
-            </a:pPr>
-            <a:r>
-              <a:t>Streaming STT and TTS</a:t>
-            </a:r>
-          </a:p>
-          <a:p>
-            <a:pPr>
-              <a:spcAft>
-                <a:spcPts val="1200"/>
-              </a:spcAft>
-              <a:defRPr sz="2200">
-                <a:solidFill>
-                  <a:srgbClr val="586376"/>
-                </a:solidFill>
-              </a:defRPr>
-            </a:pPr>
-            <a:r>
-              <a:t>Evaluation harness</a:t>
-            </a:r>
-          </a:p>
-          <a:p>
-            <a:pPr>
-              <a:spcAft>
-                <a:spcPts val="1200"/>
-              </a:spcAft>
-              <a:defRPr sz="2200">
-                <a:solidFill>
-                  <a:srgbClr val="586376"/>
-                </a:solidFill>
-              </a:defRPr>
-            </a:pPr>
-            <a:r>
-              <a:t>Calendar and provider availability integration</a:t>
+                <a:spcPts val="700"/>
+              </a:spcAft>
+              <a:defRPr sz="2100">
+                <a:solidFill>
+                  <a:srgbClr val="586376"/>
+                </a:solidFill>
+              </a:defRPr>
+            </a:pPr>
+            <a:r>
+              <a:t>Rate limit by user, tenant, and IP</a:t>
+            </a:r>
+          </a:p>
+          <a:p>
+            <a:pPr>
+              <a:spcAft>
+                <a:spcPts val="700"/>
+              </a:spcAft>
+              <a:defRPr sz="2100">
+                <a:solidFill>
+                  <a:srgbClr val="586376"/>
+                </a:solidFill>
+              </a:defRPr>
+            </a:pPr>
+            <a:r>
+              <a:t>Apply request timeouts and cancellation</a:t>
+            </a:r>
+          </a:p>
+          <a:p>
+            <a:pPr>
+              <a:spcAft>
+                <a:spcPts val="700"/>
+              </a:spcAft>
+              <a:defRPr sz="2100">
+                <a:solidFill>
+                  <a:srgbClr val="586376"/>
+                </a:solidFill>
+              </a:defRPr>
+            </a:pPr>
+            <a:r>
+              <a:t>Use retries with exponential backoff for transient provider errors</a:t>
+            </a:r>
+          </a:p>
+          <a:p>
+            <a:pPr>
+              <a:spcAft>
+                <a:spcPts val="700"/>
+              </a:spcAft>
+              <a:defRPr sz="2100">
+                <a:solidFill>
+                  <a:srgbClr val="586376"/>
+                </a:solidFill>
+              </a:defRPr>
+            </a:pPr>
+            <a:r>
+              <a:t>Circuit break failing external services</a:t>
+            </a:r>
+          </a:p>
+          <a:p>
+            <a:pPr>
+              <a:spcAft>
+                <a:spcPts val="700"/>
+              </a:spcAft>
+              <a:defRPr sz="2100">
+                <a:solidFill>
+                  <a:srgbClr val="586376"/>
+                </a:solidFill>
+              </a:defRPr>
+            </a:pPr>
+            <a:r>
+              <a:t>Cache low-risk reference data like specialties and provider metadata</a:t>
+            </a:r>
+          </a:p>
+          <a:p>
+            <a:pPr>
+              <a:spcAft>
+                <a:spcPts val="700"/>
+              </a:spcAft>
+              <a:defRPr sz="2100">
+                <a:solidFill>
+                  <a:srgbClr val="586376"/>
+                </a:solidFill>
+              </a:defRPr>
+            </a:pPr>
+            <a:r>
+              <a:t>Queue long-running audio jobs</a:t>
+            </a:r>
+          </a:p>
+          <a:p>
+            <a:pPr>
+              <a:spcAft>
+                <a:spcPts val="700"/>
+              </a:spcAft>
+              <a:defRPr sz="2100">
+                <a:solidFill>
+                  <a:srgbClr val="586376"/>
+                </a:solidFill>
+              </a:defRPr>
+            </a:pPr>
+            <a:r>
+              <a:t>Backpressure voice requests when queues are saturated</a:t>
             </a:r>
           </a:p>
         </p:txBody>
@@ -4643,8 +4693,8 @@
         </p:nvSpPr>
         <p:spPr>
           <a:xfrm>
-            <a:off x="594360" y="502920"/>
-            <a:ext cx="10789920" cy="731520"/>
+            <a:off x="594360" y="411480"/>
+            <a:ext cx="10881360" cy="685800"/>
           </a:xfrm>
           <a:prstGeom prst="rect">
             <a:avLst/>
@@ -4658,14 +4708,14 @@
           <a:lstStyle/>
           <a:p>
             <a:pPr>
-              <a:defRPr sz="3400" b="1">
+              <a:defRPr sz="3100" b="1">
                 <a:solidFill>
                   <a:srgbClr val="172033"/>
                 </a:solidFill>
               </a:defRPr>
             </a:pPr>
             <a:r>
-              <a:t>What Interviewers Should Notice</a:t>
+              <a:t>Data Consistency</a:t>
             </a:r>
           </a:p>
         </p:txBody>
@@ -4678,8 +4728,151 @@
         </p:nvSpPr>
         <p:spPr>
           <a:xfrm>
-            <a:off x="777240" y="1508760"/>
-            <a:ext cx="10607040" cy="4480560"/>
+            <a:off x="777240" y="1234440"/>
+            <a:ext cx="10607040" cy="4800600"/>
+          </a:xfrm>
+          <a:prstGeom prst="rect">
+            <a:avLst/>
+          </a:prstGeom>
+          <a:noFill/>
+        </p:spPr>
+        <p:txBody>
+          <a:bodyPr wrap="square">
+            <a:spAutoFit/>
+          </a:bodyPr>
+          <a:lstStyle/>
+          <a:p>
+            <a:pPr>
+              <a:spcAft>
+                <a:spcPts val="700"/>
+              </a:spcAft>
+              <a:defRPr sz="1700">
+                <a:solidFill>
+                  <a:srgbClr val="172033"/>
+                </a:solidFill>
+              </a:defRPr>
+            </a:pPr>
+            <a:r>
+              <a:t>Appointment booking needs stronger consistency than chat.</a:t>
+            </a:r>
+          </a:p>
+          <a:p>
+            <a:pPr>
+              <a:spcAft>
+                <a:spcPts val="700"/>
+              </a:spcAft>
+              <a:defRPr sz="1700">
+                <a:solidFill>
+                  <a:srgbClr val="172033"/>
+                </a:solidFill>
+              </a:defRPr>
+            </a:pPr>
+            <a:r>
+              <a:t>Production approach:</a:t>
+            </a:r>
+          </a:p>
+          <a:p>
+            <a:pPr>
+              <a:spcAft>
+                <a:spcPts val="700"/>
+              </a:spcAft>
+              <a:defRPr sz="1700">
+                <a:solidFill>
+                  <a:srgbClr val="586376"/>
+                </a:solidFill>
+              </a:defRPr>
+            </a:pPr>
+            <a:r>
+              <a:t>Use database transactions</a:t>
+            </a:r>
+          </a:p>
+          <a:p>
+            <a:pPr>
+              <a:spcAft>
+                <a:spcPts val="700"/>
+              </a:spcAft>
+              <a:defRPr sz="1700">
+                <a:solidFill>
+                  <a:srgbClr val="586376"/>
+                </a:solidFill>
+              </a:defRPr>
+            </a:pPr>
+            <a:r>
+              <a:t>Add unique constraints on booked slot IDs</a:t>
+            </a:r>
+          </a:p>
+          <a:p>
+            <a:pPr>
+              <a:spcAft>
+                <a:spcPts val="700"/>
+              </a:spcAft>
+              <a:defRPr sz="1700">
+                <a:solidFill>
+                  <a:srgbClr val="586376"/>
+                </a:solidFill>
+              </a:defRPr>
+            </a:pPr>
+            <a:r>
+              <a:t>Use short-lived holds with expiration</a:t>
+            </a:r>
+          </a:p>
+          <a:p>
+            <a:pPr>
+              <a:spcAft>
+                <a:spcPts val="700"/>
+              </a:spcAft>
+              <a:defRPr sz="1700">
+                <a:solidFill>
+                  <a:srgbClr val="586376"/>
+                </a:solidFill>
+              </a:defRPr>
+            </a:pPr>
+            <a:r>
+              <a:t>Make booking operations idempotent with request IDs</a:t>
+            </a:r>
+          </a:p>
+          <a:p>
+            <a:pPr>
+              <a:spcAft>
+                <a:spcPts val="700"/>
+              </a:spcAft>
+              <a:defRPr sz="1700">
+                <a:solidFill>
+                  <a:srgbClr val="586376"/>
+                </a:solidFill>
+              </a:defRPr>
+            </a:pPr>
+            <a:r>
+              <a:t>Record all state changes in an audit log</a:t>
+            </a:r>
+          </a:p>
+          <a:p>
+            <a:pPr>
+              <a:spcAft>
+                <a:spcPts val="700"/>
+              </a:spcAft>
+              <a:defRPr sz="1700">
+                <a:solidFill>
+                  <a:srgbClr val="586376"/>
+                </a:solidFill>
+              </a:defRPr>
+            </a:pPr>
+            <a:r>
+              <a:t>Reconcile with the source scheduling system</a:t>
+            </a:r>
+          </a:p>
+        </p:txBody>
+      </p:sp>
+      <p:sp>
+        <p:nvSpPr>
+          <p:cNvPr id="5" name="TextBox 4"/>
+          <p:cNvSpPr txBox="1"/>
+          <p:nvPr/>
+        </p:nvSpPr>
+        <p:spPr>
+          <a:xfrm>
+            <a:off x="777240" y="6263640"/>
+            <a:ext cx="10607040" cy="274320"/>
           </a:xfrm>
           <a:prstGeom prst="rect">
             <a:avLst/>
@@ -4693,107 +4886,321 @@
           <a:lstStyle/>
           <a:p>
             <a:pPr>
-              <a:spcAft>
-                <a:spcPts val="1200"/>
-              </a:spcAft>
-              <a:defRPr sz="2200">
-                <a:solidFill>
-                  <a:srgbClr val="586376"/>
-                </a:solidFill>
-              </a:defRPr>
-            </a:pPr>
-            <a:r>
-              <a:t>Technical depth</a:t>
-            </a:r>
-          </a:p>
-          <a:p>
-            <a:pPr>
-              <a:spcAft>
-                <a:spcPts val="1200"/>
-              </a:spcAft>
-              <a:defRPr sz="2200">
-                <a:solidFill>
-                  <a:srgbClr val="586376"/>
-                </a:solidFill>
-              </a:defRPr>
-            </a:pPr>
-            <a:r>
-              <a:t>Clear ownership</a:t>
-            </a:r>
-          </a:p>
-          <a:p>
-            <a:pPr>
-              <a:spcAft>
-                <a:spcPts val="1200"/>
-              </a:spcAft>
-              <a:defRPr sz="2200">
-                <a:solidFill>
-                  <a:srgbClr val="586376"/>
-                </a:solidFill>
-              </a:defRPr>
-            </a:pPr>
-            <a:r>
-              <a:t>Product thinking</a:t>
-            </a:r>
-          </a:p>
-          <a:p>
-            <a:pPr>
-              <a:spcAft>
-                <a:spcPts val="1200"/>
-              </a:spcAft>
-              <a:defRPr sz="2200">
-                <a:solidFill>
-                  <a:srgbClr val="586376"/>
-                </a:solidFill>
-              </a:defRPr>
-            </a:pPr>
-            <a:r>
-              <a:t>Safety-oriented design</a:t>
-            </a:r>
-          </a:p>
-          <a:p>
-            <a:pPr>
-              <a:spcAft>
-                <a:spcPts val="1200"/>
-              </a:spcAft>
-              <a:defRPr sz="2200">
-                <a:solidFill>
-                  <a:srgbClr val="586376"/>
-                </a:solidFill>
-              </a:defRPr>
-            </a:pPr>
-            <a:r>
-              <a:t>Testability</a:t>
-            </a:r>
-          </a:p>
-          <a:p>
-            <a:pPr>
-              <a:spcAft>
-                <a:spcPts val="1200"/>
-              </a:spcAft>
-              <a:defRPr sz="2200">
-                <a:solidFill>
-                  <a:srgbClr val="586376"/>
-                </a:solidFill>
-              </a:defRPr>
-            </a:pPr>
-            <a:r>
-              <a:t>Practical tradeoff decisions</a:t>
-            </a:r>
-          </a:p>
-          <a:p>
-            <a:pPr>
-              <a:spcAft>
-                <a:spcPts val="1200"/>
-              </a:spcAft>
-              <a:defRPr sz="2200">
-                <a:solidFill>
-                  <a:srgbClr val="586376"/>
-                </a:solidFill>
-              </a:defRPr>
-            </a:pPr>
-            <a:r>
-              <a:t>End-to-end communication</a:t>
+              <a:defRPr sz="1000">
+                <a:solidFill>
+                  <a:srgbClr val="586376"/>
+                </a:solidFill>
+              </a:defRPr>
+            </a:pPr>
+            <a:r>
+              <a:t>Appointment Scheduling AI Agent | 15</a:t>
+            </a:r>
+          </a:p>
+        </p:txBody>
+      </p:sp>
+    </p:spTree>
+  </p:cSld>
+  <p:clrMapOvr>
+    <a:masterClrMapping/>
+  </p:clrMapOvr>
+</p:sld>
+</file>
+
+<file path=ppt/slides/slide16.xml><?xml version="1.0" encoding="utf-8"?>
+<p:sld xmlns:a="http://schemas.openxmlformats.org/drawingml/2006/main" xmlns:p="http://schemas.openxmlformats.org/presentationml/2006/main" xmlns:r="http://schemas.openxmlformats.org/officeDocument/2006/relationships">
+  <p:cSld>
+    <p:bg>
+      <p:bgPr>
+        <a:solidFill>
+          <a:srgbClr val="F7F8FB"/>
+        </a:solidFill>
+        <a:effectLst/>
+      </p:bgPr>
+    </p:bg>
+    <p:spTree>
+      <p:nvGrpSpPr>
+        <p:cNvPr id="1" name=""/>
+        <p:cNvGrpSpPr/>
+        <p:nvPr/>
+      </p:nvGrpSpPr>
+      <p:grpSpPr/>
+      <p:sp>
+        <p:nvSpPr>
+          <p:cNvPr id="2" name="Rectangle 1"/>
+          <p:cNvSpPr/>
+          <p:nvPr/>
+        </p:nvSpPr>
+        <p:spPr>
+          <a:xfrm>
+            <a:off x="0" y="0"/>
+            <a:ext cx="128016" cy="6858000"/>
+          </a:xfrm>
+          <a:prstGeom prst="rect">
+            <a:avLst/>
+          </a:prstGeom>
+          <a:solidFill>
+            <a:srgbClr val="0F766E"/>
+          </a:solidFill>
+          <a:ln>
+            <a:noFill/>
+          </a:ln>
+        </p:spPr>
+        <p:style>
+          <a:lnRef idx="1">
+            <a:schemeClr val="accent1"/>
+          </a:lnRef>
+          <a:fillRef idx="3">
+            <a:schemeClr val="accent1"/>
+          </a:fillRef>
+          <a:effectRef idx="2">
+            <a:schemeClr val="accent1"/>
+          </a:effectRef>
+          <a:fontRef idx="minor">
+            <a:schemeClr val="lt1"/>
+          </a:fontRef>
+        </p:style>
+        <p:txBody>
+          <a:bodyPr rtlCol="0" anchor="ctr"/>
+          <a:lstStyle/>
+          <a:p>
+            <a:pPr algn="ctr"/>
+          </a:p>
+        </p:txBody>
+      </p:sp>
+      <p:sp>
+        <p:nvSpPr>
+          <p:cNvPr id="3" name="TextBox 2"/>
+          <p:cNvSpPr txBox="1"/>
+          <p:nvPr/>
+        </p:nvSpPr>
+        <p:spPr>
+          <a:xfrm>
+            <a:off x="594360" y="411480"/>
+            <a:ext cx="10881360" cy="685800"/>
+          </a:xfrm>
+          <a:prstGeom prst="rect">
+            <a:avLst/>
+          </a:prstGeom>
+          <a:noFill/>
+        </p:spPr>
+        <p:txBody>
+          <a:bodyPr wrap="none">
+            <a:spAutoFit/>
+          </a:bodyPr>
+          <a:lstStyle/>
+          <a:p>
+            <a:pPr>
+              <a:defRPr sz="2700" b="1">
+                <a:solidFill>
+                  <a:srgbClr val="172033"/>
+                </a:solidFill>
+              </a:defRPr>
+            </a:pPr>
+            <a:r>
+              <a:t>Reliability And Failure Modes</a:t>
+            </a:r>
+          </a:p>
+        </p:txBody>
+      </p:sp>
+      <p:sp>
+        <p:nvSpPr>
+          <p:cNvPr id="4" name="TextBox 3"/>
+          <p:cNvSpPr txBox="1"/>
+          <p:nvPr/>
+        </p:nvSpPr>
+        <p:spPr>
+          <a:xfrm>
+            <a:off x="777240" y="1234440"/>
+            <a:ext cx="10607040" cy="4800600"/>
+          </a:xfrm>
+          <a:prstGeom prst="rect">
+            <a:avLst/>
+          </a:prstGeom>
+          <a:noFill/>
+        </p:spPr>
+        <p:txBody>
+          <a:bodyPr wrap="square">
+            <a:spAutoFit/>
+          </a:bodyPr>
+          <a:lstStyle/>
+          <a:p>
+            <a:pPr>
+              <a:spcAft>
+                <a:spcPts val="700"/>
+              </a:spcAft>
+              <a:defRPr sz="1400">
+                <a:solidFill>
+                  <a:srgbClr val="172033"/>
+                </a:solidFill>
+              </a:defRPr>
+            </a:pPr>
+            <a:r>
+              <a:t>Plan for:</a:t>
+            </a:r>
+          </a:p>
+          <a:p>
+            <a:pPr>
+              <a:spcAft>
+                <a:spcPts val="700"/>
+              </a:spcAft>
+              <a:defRPr sz="1400">
+                <a:solidFill>
+                  <a:srgbClr val="586376"/>
+                </a:solidFill>
+              </a:defRPr>
+            </a:pPr>
+            <a:r>
+              <a:t>OpenAI latency or outage</a:t>
+            </a:r>
+          </a:p>
+          <a:p>
+            <a:pPr>
+              <a:spcAft>
+                <a:spcPts val="700"/>
+              </a:spcAft>
+              <a:defRPr sz="1400">
+                <a:solidFill>
+                  <a:srgbClr val="586376"/>
+                </a:solidFill>
+              </a:defRPr>
+            </a:pPr>
+            <a:r>
+              <a:t>STT or TTS failure</a:t>
+            </a:r>
+          </a:p>
+          <a:p>
+            <a:pPr>
+              <a:spcAft>
+                <a:spcPts val="700"/>
+              </a:spcAft>
+              <a:defRPr sz="1400">
+                <a:solidFill>
+                  <a:srgbClr val="586376"/>
+                </a:solidFill>
+              </a:defRPr>
+            </a:pPr>
+            <a:r>
+              <a:t>Scheduling backend timeout</a:t>
+            </a:r>
+          </a:p>
+          <a:p>
+            <a:pPr>
+              <a:spcAft>
+                <a:spcPts val="700"/>
+              </a:spcAft>
+              <a:defRPr sz="1400">
+                <a:solidFill>
+                  <a:srgbClr val="586376"/>
+                </a:solidFill>
+              </a:defRPr>
+            </a:pPr>
+            <a:r>
+              <a:t>Duplicate requests</a:t>
+            </a:r>
+          </a:p>
+          <a:p>
+            <a:pPr>
+              <a:spcAft>
+                <a:spcPts val="700"/>
+              </a:spcAft>
+              <a:defRPr sz="1400">
+                <a:solidFill>
+                  <a:srgbClr val="586376"/>
+                </a:solidFill>
+              </a:defRPr>
+            </a:pPr>
+            <a:r>
+              <a:t>User refreshes or reconnects</a:t>
+            </a:r>
+          </a:p>
+          <a:p>
+            <a:pPr>
+              <a:spcAft>
+                <a:spcPts val="700"/>
+              </a:spcAft>
+              <a:defRPr sz="1400">
+                <a:solidFill>
+                  <a:srgbClr val="586376"/>
+                </a:solidFill>
+              </a:defRPr>
+            </a:pPr>
+            <a:r>
+              <a:t>Partial tool execution</a:t>
+            </a:r>
+          </a:p>
+          <a:p>
+            <a:pPr>
+              <a:spcAft>
+                <a:spcPts val="700"/>
+              </a:spcAft>
+              <a:defRPr sz="1400">
+                <a:solidFill>
+                  <a:srgbClr val="586376"/>
+                </a:solidFill>
+              </a:defRPr>
+            </a:pPr>
+            <a:r>
+              <a:t>Browser microphone permission failure</a:t>
+            </a:r>
+          </a:p>
+          <a:p>
+            <a:pPr>
+              <a:spcAft>
+                <a:spcPts val="700"/>
+              </a:spcAft>
+              <a:defRPr sz="1400">
+                <a:solidFill>
+                  <a:srgbClr val="172033"/>
+                </a:solidFill>
+              </a:defRPr>
+            </a:pPr>
+            <a:r>
+              <a:t>Fallbacks:</a:t>
+            </a:r>
+          </a:p>
+          <a:p>
+            <a:pPr>
+              <a:spcAft>
+                <a:spcPts val="700"/>
+              </a:spcAft>
+              <a:defRPr sz="1400">
+                <a:solidFill>
+                  <a:srgbClr val="586376"/>
+                </a:solidFill>
+              </a:defRPr>
+            </a:pPr>
+            <a:r>
+              <a:t>Preserve text chat if voice fails</a:t>
+            </a:r>
+          </a:p>
+          <a:p>
+            <a:pPr>
+              <a:spcAft>
+                <a:spcPts val="700"/>
+              </a:spcAft>
+              <a:defRPr sz="1400">
+                <a:solidFill>
+                  <a:srgbClr val="586376"/>
+                </a:solidFill>
+              </a:defRPr>
+            </a:pPr>
+            <a:r>
+              <a:t>Show clear retryable errors</a:t>
+            </a:r>
+          </a:p>
+          <a:p>
+            <a:pPr>
+              <a:spcAft>
+                <a:spcPts val="700"/>
+              </a:spcAft>
+              <a:defRPr sz="1400">
+                <a:solidFill>
+                  <a:srgbClr val="586376"/>
+                </a:solidFill>
+              </a:defRPr>
+            </a:pPr>
+            <a:r>
+              <a:t>Hand off to human support when needed</a:t>
             </a:r>
           </a:p>
         </p:txBody>
@@ -4828,7 +5235,943 @@
               </a:defRPr>
             </a:pPr>
             <a:r>
-              <a:t>Appointment Scheduling AI Agent | 15</a:t>
+              <a:t>Appointment Scheduling AI Agent | 16</a:t>
+            </a:r>
+          </a:p>
+        </p:txBody>
+      </p:sp>
+    </p:spTree>
+  </p:cSld>
+  <p:clrMapOvr>
+    <a:masterClrMapping/>
+  </p:clrMapOvr>
+</p:sld>
+</file>
+
+<file path=ppt/slides/slide17.xml><?xml version="1.0" encoding="utf-8"?>
+<p:sld xmlns:a="http://schemas.openxmlformats.org/drawingml/2006/main" xmlns:p="http://schemas.openxmlformats.org/presentationml/2006/main" xmlns:r="http://schemas.openxmlformats.org/officeDocument/2006/relationships">
+  <p:cSld>
+    <p:bg>
+      <p:bgPr>
+        <a:solidFill>
+          <a:srgbClr val="F7F8FB"/>
+        </a:solidFill>
+        <a:effectLst/>
+      </p:bgPr>
+    </p:bg>
+    <p:spTree>
+      <p:nvGrpSpPr>
+        <p:cNvPr id="1" name=""/>
+        <p:cNvGrpSpPr/>
+        <p:nvPr/>
+      </p:nvGrpSpPr>
+      <p:grpSpPr/>
+      <p:sp>
+        <p:nvSpPr>
+          <p:cNvPr id="2" name="Rectangle 1"/>
+          <p:cNvSpPr/>
+          <p:nvPr/>
+        </p:nvSpPr>
+        <p:spPr>
+          <a:xfrm>
+            <a:off x="0" y="0"/>
+            <a:ext cx="128016" cy="6858000"/>
+          </a:xfrm>
+          <a:prstGeom prst="rect">
+            <a:avLst/>
+          </a:prstGeom>
+          <a:solidFill>
+            <a:srgbClr val="0F766E"/>
+          </a:solidFill>
+          <a:ln>
+            <a:noFill/>
+          </a:ln>
+        </p:spPr>
+        <p:style>
+          <a:lnRef idx="1">
+            <a:schemeClr val="accent1"/>
+          </a:lnRef>
+          <a:fillRef idx="3">
+            <a:schemeClr val="accent1"/>
+          </a:fillRef>
+          <a:effectRef idx="2">
+            <a:schemeClr val="accent1"/>
+          </a:effectRef>
+          <a:fontRef idx="minor">
+            <a:schemeClr val="lt1"/>
+          </a:fontRef>
+        </p:style>
+        <p:txBody>
+          <a:bodyPr rtlCol="0" anchor="ctr"/>
+          <a:lstStyle/>
+          <a:p>
+            <a:pPr algn="ctr"/>
+          </a:p>
+        </p:txBody>
+      </p:sp>
+      <p:sp>
+        <p:nvSpPr>
+          <p:cNvPr id="3" name="TextBox 2"/>
+          <p:cNvSpPr txBox="1"/>
+          <p:nvPr/>
+        </p:nvSpPr>
+        <p:spPr>
+          <a:xfrm>
+            <a:off x="594360" y="411480"/>
+            <a:ext cx="10881360" cy="685800"/>
+          </a:xfrm>
+          <a:prstGeom prst="rect">
+            <a:avLst/>
+          </a:prstGeom>
+          <a:noFill/>
+        </p:spPr>
+        <p:txBody>
+          <a:bodyPr wrap="none">
+            <a:spAutoFit/>
+          </a:bodyPr>
+          <a:lstStyle/>
+          <a:p>
+            <a:pPr>
+              <a:defRPr sz="3100" b="1">
+                <a:solidFill>
+                  <a:srgbClr val="172033"/>
+                </a:solidFill>
+              </a:defRPr>
+            </a:pPr>
+            <a:r>
+              <a:t>Security And Compliance</a:t>
+            </a:r>
+          </a:p>
+        </p:txBody>
+      </p:sp>
+      <p:sp>
+        <p:nvSpPr>
+          <p:cNvPr id="4" name="TextBox 3"/>
+          <p:cNvSpPr txBox="1"/>
+          <p:nvPr/>
+        </p:nvSpPr>
+        <p:spPr>
+          <a:xfrm>
+            <a:off x="777240" y="1234440"/>
+            <a:ext cx="10607040" cy="4800600"/>
+          </a:xfrm>
+          <a:prstGeom prst="rect">
+            <a:avLst/>
+          </a:prstGeom>
+          <a:noFill/>
+        </p:spPr>
+        <p:txBody>
+          <a:bodyPr wrap="square">
+            <a:spAutoFit/>
+          </a:bodyPr>
+          <a:lstStyle/>
+          <a:p>
+            <a:pPr>
+              <a:spcAft>
+                <a:spcPts val="700"/>
+              </a:spcAft>
+              <a:defRPr sz="1700">
+                <a:solidFill>
+                  <a:srgbClr val="172033"/>
+                </a:solidFill>
+              </a:defRPr>
+            </a:pPr>
+            <a:r>
+              <a:t>Healthcare-adjacent production systems need:</a:t>
+            </a:r>
+          </a:p>
+          <a:p>
+            <a:pPr>
+              <a:spcAft>
+                <a:spcPts val="700"/>
+              </a:spcAft>
+              <a:defRPr sz="1700">
+                <a:solidFill>
+                  <a:srgbClr val="586376"/>
+                </a:solidFill>
+              </a:defRPr>
+            </a:pPr>
+            <a:r>
+              <a:t>Authentication and authorization</a:t>
+            </a:r>
+          </a:p>
+          <a:p>
+            <a:pPr>
+              <a:spcAft>
+                <a:spcPts val="700"/>
+              </a:spcAft>
+              <a:defRPr sz="1700">
+                <a:solidFill>
+                  <a:srgbClr val="586376"/>
+                </a:solidFill>
+              </a:defRPr>
+            </a:pPr>
+            <a:r>
+              <a:t>Tenant isolation</a:t>
+            </a:r>
+          </a:p>
+          <a:p>
+            <a:pPr>
+              <a:spcAft>
+                <a:spcPts val="700"/>
+              </a:spcAft>
+              <a:defRPr sz="1700">
+                <a:solidFill>
+                  <a:srgbClr val="586376"/>
+                </a:solidFill>
+              </a:defRPr>
+            </a:pPr>
+            <a:r>
+              <a:t>Secrets management</a:t>
+            </a:r>
+          </a:p>
+          <a:p>
+            <a:pPr>
+              <a:spcAft>
+                <a:spcPts val="700"/>
+              </a:spcAft>
+              <a:defRPr sz="1700">
+                <a:solidFill>
+                  <a:srgbClr val="586376"/>
+                </a:solidFill>
+              </a:defRPr>
+            </a:pPr>
+            <a:r>
+              <a:t>Encryption in transit and at rest</a:t>
+            </a:r>
+          </a:p>
+          <a:p>
+            <a:pPr>
+              <a:spcAft>
+                <a:spcPts val="700"/>
+              </a:spcAft>
+              <a:defRPr sz="1700">
+                <a:solidFill>
+                  <a:srgbClr val="586376"/>
+                </a:solidFill>
+              </a:defRPr>
+            </a:pPr>
+            <a:r>
+              <a:t>Least-privilege access</a:t>
+            </a:r>
+          </a:p>
+          <a:p>
+            <a:pPr>
+              <a:spcAft>
+                <a:spcPts val="700"/>
+              </a:spcAft>
+              <a:defRPr sz="1700">
+                <a:solidFill>
+                  <a:srgbClr val="586376"/>
+                </a:solidFill>
+              </a:defRPr>
+            </a:pPr>
+            <a:r>
+              <a:t>PHI minimization</a:t>
+            </a:r>
+          </a:p>
+          <a:p>
+            <a:pPr>
+              <a:spcAft>
+                <a:spcPts val="700"/>
+              </a:spcAft>
+              <a:defRPr sz="1700">
+                <a:solidFill>
+                  <a:srgbClr val="586376"/>
+                </a:solidFill>
+              </a:defRPr>
+            </a:pPr>
+            <a:r>
+              <a:t>Retention and deletion policies</a:t>
+            </a:r>
+          </a:p>
+          <a:p>
+            <a:pPr>
+              <a:spcAft>
+                <a:spcPts val="700"/>
+              </a:spcAft>
+              <a:defRPr sz="1700">
+                <a:solidFill>
+                  <a:srgbClr val="586376"/>
+                </a:solidFill>
+              </a:defRPr>
+            </a:pPr>
+            <a:r>
+              <a:t>HIPAA and security review</a:t>
+            </a:r>
+          </a:p>
+          <a:p>
+            <a:pPr>
+              <a:spcAft>
+                <a:spcPts val="700"/>
+              </a:spcAft>
+              <a:defRPr sz="1700">
+                <a:solidFill>
+                  <a:srgbClr val="586376"/>
+                </a:solidFill>
+              </a:defRPr>
+            </a:pPr>
+            <a:r>
+              <a:t>Human handoff and escalation policies</a:t>
+            </a:r>
+          </a:p>
+        </p:txBody>
+      </p:sp>
+      <p:sp>
+        <p:nvSpPr>
+          <p:cNvPr id="5" name="TextBox 4"/>
+          <p:cNvSpPr txBox="1"/>
+          <p:nvPr/>
+        </p:nvSpPr>
+        <p:spPr>
+          <a:xfrm>
+            <a:off x="777240" y="6263640"/>
+            <a:ext cx="10607040" cy="274320"/>
+          </a:xfrm>
+          <a:prstGeom prst="rect">
+            <a:avLst/>
+          </a:prstGeom>
+          <a:noFill/>
+        </p:spPr>
+        <p:txBody>
+          <a:bodyPr wrap="none">
+            <a:spAutoFit/>
+          </a:bodyPr>
+          <a:lstStyle/>
+          <a:p>
+            <a:pPr>
+              <a:defRPr sz="1000">
+                <a:solidFill>
+                  <a:srgbClr val="586376"/>
+                </a:solidFill>
+              </a:defRPr>
+            </a:pPr>
+            <a:r>
+              <a:t>Appointment Scheduling AI Agent | 17</a:t>
+            </a:r>
+          </a:p>
+        </p:txBody>
+      </p:sp>
+    </p:spTree>
+  </p:cSld>
+  <p:clrMapOvr>
+    <a:masterClrMapping/>
+  </p:clrMapOvr>
+</p:sld>
+</file>
+
+<file path=ppt/slides/slide18.xml><?xml version="1.0" encoding="utf-8"?>
+<p:sld xmlns:a="http://schemas.openxmlformats.org/drawingml/2006/main" xmlns:p="http://schemas.openxmlformats.org/presentationml/2006/main" xmlns:r="http://schemas.openxmlformats.org/officeDocument/2006/relationships">
+  <p:cSld>
+    <p:bg>
+      <p:bgPr>
+        <a:solidFill>
+          <a:srgbClr val="F7F8FB"/>
+        </a:solidFill>
+        <a:effectLst/>
+      </p:bgPr>
+    </p:bg>
+    <p:spTree>
+      <p:nvGrpSpPr>
+        <p:cNvPr id="1" name=""/>
+        <p:cNvGrpSpPr/>
+        <p:nvPr/>
+      </p:nvGrpSpPr>
+      <p:grpSpPr/>
+      <p:sp>
+        <p:nvSpPr>
+          <p:cNvPr id="2" name="Rectangle 1"/>
+          <p:cNvSpPr/>
+          <p:nvPr/>
+        </p:nvSpPr>
+        <p:spPr>
+          <a:xfrm>
+            <a:off x="0" y="0"/>
+            <a:ext cx="128016" cy="6858000"/>
+          </a:xfrm>
+          <a:prstGeom prst="rect">
+            <a:avLst/>
+          </a:prstGeom>
+          <a:solidFill>
+            <a:srgbClr val="0F766E"/>
+          </a:solidFill>
+          <a:ln>
+            <a:noFill/>
+          </a:ln>
+        </p:spPr>
+        <p:style>
+          <a:lnRef idx="1">
+            <a:schemeClr val="accent1"/>
+          </a:lnRef>
+          <a:fillRef idx="3">
+            <a:schemeClr val="accent1"/>
+          </a:fillRef>
+          <a:effectRef idx="2">
+            <a:schemeClr val="accent1"/>
+          </a:effectRef>
+          <a:fontRef idx="minor">
+            <a:schemeClr val="lt1"/>
+          </a:fontRef>
+        </p:style>
+        <p:txBody>
+          <a:bodyPr rtlCol="0" anchor="ctr"/>
+          <a:lstStyle/>
+          <a:p>
+            <a:pPr algn="ctr"/>
+          </a:p>
+        </p:txBody>
+      </p:sp>
+      <p:sp>
+        <p:nvSpPr>
+          <p:cNvPr id="3" name="TextBox 2"/>
+          <p:cNvSpPr txBox="1"/>
+          <p:nvPr/>
+        </p:nvSpPr>
+        <p:spPr>
+          <a:xfrm>
+            <a:off x="594360" y="411480"/>
+            <a:ext cx="10881360" cy="685800"/>
+          </a:xfrm>
+          <a:prstGeom prst="rect">
+            <a:avLst/>
+          </a:prstGeom>
+          <a:noFill/>
+        </p:spPr>
+        <p:txBody>
+          <a:bodyPr wrap="none">
+            <a:spAutoFit/>
+          </a:bodyPr>
+          <a:lstStyle/>
+          <a:p>
+            <a:pPr>
+              <a:defRPr sz="3100" b="1">
+                <a:solidFill>
+                  <a:srgbClr val="172033"/>
+                </a:solidFill>
+              </a:defRPr>
+            </a:pPr>
+            <a:r>
+              <a:t>Observability</a:t>
+            </a:r>
+          </a:p>
+        </p:txBody>
+      </p:sp>
+      <p:sp>
+        <p:nvSpPr>
+          <p:cNvPr id="4" name="TextBox 3"/>
+          <p:cNvSpPr txBox="1"/>
+          <p:nvPr/>
+        </p:nvSpPr>
+        <p:spPr>
+          <a:xfrm>
+            <a:off x="777240" y="1234440"/>
+            <a:ext cx="10607040" cy="4800600"/>
+          </a:xfrm>
+          <a:prstGeom prst="rect">
+            <a:avLst/>
+          </a:prstGeom>
+          <a:noFill/>
+        </p:spPr>
+        <p:txBody>
+          <a:bodyPr wrap="square">
+            <a:spAutoFit/>
+          </a:bodyPr>
+          <a:lstStyle/>
+          <a:p>
+            <a:pPr>
+              <a:spcAft>
+                <a:spcPts val="700"/>
+              </a:spcAft>
+              <a:defRPr sz="1700">
+                <a:solidFill>
+                  <a:srgbClr val="172033"/>
+                </a:solidFill>
+              </a:defRPr>
+            </a:pPr>
+            <a:r>
+              <a:t>Track:</a:t>
+            </a:r>
+          </a:p>
+          <a:p>
+            <a:pPr>
+              <a:spcAft>
+                <a:spcPts val="700"/>
+              </a:spcAft>
+              <a:defRPr sz="1700">
+                <a:solidFill>
+                  <a:srgbClr val="586376"/>
+                </a:solidFill>
+              </a:defRPr>
+            </a:pPr>
+            <a:r>
+              <a:t>Request latency by endpoint</a:t>
+            </a:r>
+          </a:p>
+          <a:p>
+            <a:pPr>
+              <a:spcAft>
+                <a:spcPts val="700"/>
+              </a:spcAft>
+              <a:defRPr sz="1700">
+                <a:solidFill>
+                  <a:srgbClr val="586376"/>
+                </a:solidFill>
+              </a:defRPr>
+            </a:pPr>
+            <a:r>
+              <a:t>LLM latency and tool-call counts</a:t>
+            </a:r>
+          </a:p>
+          <a:p>
+            <a:pPr>
+              <a:spcAft>
+                <a:spcPts val="700"/>
+              </a:spcAft>
+              <a:defRPr sz="1700">
+                <a:solidFill>
+                  <a:srgbClr val="586376"/>
+                </a:solidFill>
+              </a:defRPr>
+            </a:pPr>
+            <a:r>
+              <a:t>STT and TTS latency</a:t>
+            </a:r>
+          </a:p>
+          <a:p>
+            <a:pPr>
+              <a:spcAft>
+                <a:spcPts val="700"/>
+              </a:spcAft>
+              <a:defRPr sz="1700">
+                <a:solidFill>
+                  <a:srgbClr val="586376"/>
+                </a:solidFill>
+              </a:defRPr>
+            </a:pPr>
+            <a:r>
+              <a:t>Tool success and error rates</a:t>
+            </a:r>
+          </a:p>
+          <a:p>
+            <a:pPr>
+              <a:spcAft>
+                <a:spcPts val="700"/>
+              </a:spcAft>
+              <a:defRPr sz="1700">
+                <a:solidFill>
+                  <a:srgbClr val="586376"/>
+                </a:solidFill>
+              </a:defRPr>
+            </a:pPr>
+            <a:r>
+              <a:t>Booking, cancel, and reschedule conversion</a:t>
+            </a:r>
+          </a:p>
+          <a:p>
+            <a:pPr>
+              <a:spcAft>
+                <a:spcPts val="700"/>
+              </a:spcAft>
+              <a:defRPr sz="1700">
+                <a:solidFill>
+                  <a:srgbClr val="586376"/>
+                </a:solidFill>
+              </a:defRPr>
+            </a:pPr>
+            <a:r>
+              <a:t>Emergency detection events</a:t>
+            </a:r>
+          </a:p>
+          <a:p>
+            <a:pPr>
+              <a:spcAft>
+                <a:spcPts val="700"/>
+              </a:spcAft>
+              <a:defRPr sz="1700">
+                <a:solidFill>
+                  <a:srgbClr val="586376"/>
+                </a:solidFill>
+              </a:defRPr>
+            </a:pPr>
+            <a:r>
+              <a:t>User interruption events</a:t>
+            </a:r>
+          </a:p>
+          <a:p>
+            <a:pPr>
+              <a:spcAft>
+                <a:spcPts val="700"/>
+              </a:spcAft>
+              <a:defRPr sz="1700">
+                <a:solidFill>
+                  <a:srgbClr val="586376"/>
+                </a:solidFill>
+              </a:defRPr>
+            </a:pPr>
+            <a:r>
+              <a:t>Cost per conversation</a:t>
+            </a:r>
+          </a:p>
+          <a:p>
+            <a:pPr>
+              <a:spcAft>
+                <a:spcPts val="700"/>
+              </a:spcAft>
+              <a:defRPr sz="1700">
+                <a:solidFill>
+                  <a:srgbClr val="172033"/>
+                </a:solidFill>
+              </a:defRPr>
+            </a:pPr>
+            <a:r>
+              <a:t>Use traces to connect user request, model call, tool call, and scheduling backend call.</a:t>
+            </a:r>
+          </a:p>
+        </p:txBody>
+      </p:sp>
+      <p:sp>
+        <p:nvSpPr>
+          <p:cNvPr id="5" name="TextBox 4"/>
+          <p:cNvSpPr txBox="1"/>
+          <p:nvPr/>
+        </p:nvSpPr>
+        <p:spPr>
+          <a:xfrm>
+            <a:off x="777240" y="6263640"/>
+            <a:ext cx="10607040" cy="274320"/>
+          </a:xfrm>
+          <a:prstGeom prst="rect">
+            <a:avLst/>
+          </a:prstGeom>
+          <a:noFill/>
+        </p:spPr>
+        <p:txBody>
+          <a:bodyPr wrap="none">
+            <a:spAutoFit/>
+          </a:bodyPr>
+          <a:lstStyle/>
+          <a:p>
+            <a:pPr>
+              <a:defRPr sz="1000">
+                <a:solidFill>
+                  <a:srgbClr val="586376"/>
+                </a:solidFill>
+              </a:defRPr>
+            </a:pPr>
+            <a:r>
+              <a:t>Appointment Scheduling AI Agent | 18</a:t>
+            </a:r>
+          </a:p>
+        </p:txBody>
+      </p:sp>
+    </p:spTree>
+  </p:cSld>
+  <p:clrMapOvr>
+    <a:masterClrMapping/>
+  </p:clrMapOvr>
+</p:sld>
+</file>
+
+<file path=ppt/slides/slide19.xml><?xml version="1.0" encoding="utf-8"?>
+<p:sld xmlns:a="http://schemas.openxmlformats.org/drawingml/2006/main" xmlns:p="http://schemas.openxmlformats.org/presentationml/2006/main" xmlns:r="http://schemas.openxmlformats.org/officeDocument/2006/relationships">
+  <p:cSld>
+    <p:bg>
+      <p:bgPr>
+        <a:solidFill>
+          <a:srgbClr val="F7F8FB"/>
+        </a:solidFill>
+        <a:effectLst/>
+      </p:bgPr>
+    </p:bg>
+    <p:spTree>
+      <p:nvGrpSpPr>
+        <p:cNvPr id="1" name=""/>
+        <p:cNvGrpSpPr/>
+        <p:nvPr/>
+      </p:nvGrpSpPr>
+      <p:grpSpPr/>
+      <p:sp>
+        <p:nvSpPr>
+          <p:cNvPr id="2" name="Rectangle 1"/>
+          <p:cNvSpPr/>
+          <p:nvPr/>
+        </p:nvSpPr>
+        <p:spPr>
+          <a:xfrm>
+            <a:off x="0" y="0"/>
+            <a:ext cx="128016" cy="6858000"/>
+          </a:xfrm>
+          <a:prstGeom prst="rect">
+            <a:avLst/>
+          </a:prstGeom>
+          <a:solidFill>
+            <a:srgbClr val="0F766E"/>
+          </a:solidFill>
+          <a:ln>
+            <a:noFill/>
+          </a:ln>
+        </p:spPr>
+        <p:style>
+          <a:lnRef idx="1">
+            <a:schemeClr val="accent1"/>
+          </a:lnRef>
+          <a:fillRef idx="3">
+            <a:schemeClr val="accent1"/>
+          </a:fillRef>
+          <a:effectRef idx="2">
+            <a:schemeClr val="accent1"/>
+          </a:effectRef>
+          <a:fontRef idx="minor">
+            <a:schemeClr val="lt1"/>
+          </a:fontRef>
+        </p:style>
+        <p:txBody>
+          <a:bodyPr rtlCol="0" anchor="ctr"/>
+          <a:lstStyle/>
+          <a:p>
+            <a:pPr algn="ctr"/>
+          </a:p>
+        </p:txBody>
+      </p:sp>
+      <p:sp>
+        <p:nvSpPr>
+          <p:cNvPr id="3" name="TextBox 2"/>
+          <p:cNvSpPr txBox="1"/>
+          <p:nvPr/>
+        </p:nvSpPr>
+        <p:spPr>
+          <a:xfrm>
+            <a:off x="594360" y="411480"/>
+            <a:ext cx="10881360" cy="685800"/>
+          </a:xfrm>
+          <a:prstGeom prst="rect">
+            <a:avLst/>
+          </a:prstGeom>
+          <a:noFill/>
+        </p:spPr>
+        <p:txBody>
+          <a:bodyPr wrap="none">
+            <a:spAutoFit/>
+          </a:bodyPr>
+          <a:lstStyle/>
+          <a:p>
+            <a:pPr>
+              <a:defRPr sz="3100" b="1">
+                <a:solidFill>
+                  <a:srgbClr val="172033"/>
+                </a:solidFill>
+              </a:defRPr>
+            </a:pPr>
+            <a:r>
+              <a:t>Evaluation And Quality</a:t>
+            </a:r>
+          </a:p>
+        </p:txBody>
+      </p:sp>
+      <p:sp>
+        <p:nvSpPr>
+          <p:cNvPr id="4" name="TextBox 3"/>
+          <p:cNvSpPr txBox="1"/>
+          <p:nvPr/>
+        </p:nvSpPr>
+        <p:spPr>
+          <a:xfrm>
+            <a:off x="777240" y="1234440"/>
+            <a:ext cx="10607040" cy="4800600"/>
+          </a:xfrm>
+          <a:prstGeom prst="rect">
+            <a:avLst/>
+          </a:prstGeom>
+          <a:noFill/>
+        </p:spPr>
+        <p:txBody>
+          <a:bodyPr wrap="square">
+            <a:spAutoFit/>
+          </a:bodyPr>
+          <a:lstStyle/>
+          <a:p>
+            <a:pPr>
+              <a:spcAft>
+                <a:spcPts val="700"/>
+              </a:spcAft>
+              <a:defRPr sz="1700">
+                <a:solidFill>
+                  <a:srgbClr val="172033"/>
+                </a:solidFill>
+              </a:defRPr>
+            </a:pPr>
+            <a:r>
+              <a:t>Evaluate:</a:t>
+            </a:r>
+          </a:p>
+          <a:p>
+            <a:pPr>
+              <a:spcAft>
+                <a:spcPts val="700"/>
+              </a:spcAft>
+              <a:defRPr sz="1700">
+                <a:solidFill>
+                  <a:srgbClr val="586376"/>
+                </a:solidFill>
+              </a:defRPr>
+            </a:pPr>
+            <a:r>
+              <a:t>Tool-call correctness</a:t>
+            </a:r>
+          </a:p>
+          <a:p>
+            <a:pPr>
+              <a:spcAft>
+                <a:spcPts val="700"/>
+              </a:spcAft>
+              <a:defRPr sz="1700">
+                <a:solidFill>
+                  <a:srgbClr val="586376"/>
+                </a:solidFill>
+              </a:defRPr>
+            </a:pPr>
+            <a:r>
+              <a:t>Confirmation compliance</a:t>
+            </a:r>
+          </a:p>
+          <a:p>
+            <a:pPr>
+              <a:spcAft>
+                <a:spcPts val="700"/>
+              </a:spcAft>
+              <a:defRPr sz="1700">
+                <a:solidFill>
+                  <a:srgbClr val="586376"/>
+                </a:solidFill>
+              </a:defRPr>
+            </a:pPr>
+            <a:r>
+              <a:t>Emergency routing</a:t>
+            </a:r>
+          </a:p>
+          <a:p>
+            <a:pPr>
+              <a:spcAft>
+                <a:spcPts val="700"/>
+              </a:spcAft>
+              <a:defRPr sz="1700">
+                <a:solidFill>
+                  <a:srgbClr val="586376"/>
+                </a:solidFill>
+              </a:defRPr>
+            </a:pPr>
+            <a:r>
+              <a:t>Hallucination rate</a:t>
+            </a:r>
+          </a:p>
+          <a:p>
+            <a:pPr>
+              <a:spcAft>
+                <a:spcPts val="700"/>
+              </a:spcAft>
+              <a:defRPr sz="1700">
+                <a:solidFill>
+                  <a:srgbClr val="586376"/>
+                </a:solidFill>
+              </a:defRPr>
+            </a:pPr>
+            <a:r>
+              <a:t>TTS readability</a:t>
+            </a:r>
+          </a:p>
+          <a:p>
+            <a:pPr>
+              <a:spcAft>
+                <a:spcPts val="700"/>
+              </a:spcAft>
+              <a:defRPr sz="1700">
+                <a:solidFill>
+                  <a:srgbClr val="586376"/>
+                </a:solidFill>
+              </a:defRPr>
+            </a:pPr>
+            <a:r>
+              <a:t>Latency</a:t>
+            </a:r>
+          </a:p>
+          <a:p>
+            <a:pPr>
+              <a:spcAft>
+                <a:spcPts val="700"/>
+              </a:spcAft>
+              <a:defRPr sz="1700">
+                <a:solidFill>
+                  <a:srgbClr val="586376"/>
+                </a:solidFill>
+              </a:defRPr>
+            </a:pPr>
+            <a:r>
+              <a:t>Conversation completion rate</a:t>
+            </a:r>
+          </a:p>
+          <a:p>
+            <a:pPr>
+              <a:spcAft>
+                <a:spcPts val="700"/>
+              </a:spcAft>
+              <a:defRPr sz="1700">
+                <a:solidFill>
+                  <a:srgbClr val="586376"/>
+                </a:solidFill>
+              </a:defRPr>
+            </a:pPr>
+            <a:r>
+              <a:t>User satisfaction</a:t>
+            </a:r>
+          </a:p>
+          <a:p>
+            <a:pPr>
+              <a:spcAft>
+                <a:spcPts val="700"/>
+              </a:spcAft>
+              <a:defRPr sz="1700">
+                <a:solidFill>
+                  <a:srgbClr val="172033"/>
+                </a:solidFill>
+              </a:defRPr>
+            </a:pPr>
+            <a:r>
+              <a:t>Use offline test sets plus live monitoring with privacy-safe review.</a:t>
+            </a:r>
+          </a:p>
+        </p:txBody>
+      </p:sp>
+      <p:sp>
+        <p:nvSpPr>
+          <p:cNvPr id="5" name="TextBox 4"/>
+          <p:cNvSpPr txBox="1"/>
+          <p:nvPr/>
+        </p:nvSpPr>
+        <p:spPr>
+          <a:xfrm>
+            <a:off x="777240" y="6263640"/>
+            <a:ext cx="10607040" cy="274320"/>
+          </a:xfrm>
+          <a:prstGeom prst="rect">
+            <a:avLst/>
+          </a:prstGeom>
+          <a:noFill/>
+        </p:spPr>
+        <p:txBody>
+          <a:bodyPr wrap="none">
+            <a:spAutoFit/>
+          </a:bodyPr>
+          <a:lstStyle/>
+          <a:p>
+            <a:pPr>
+              <a:defRPr sz="1000">
+                <a:solidFill>
+                  <a:srgbClr val="586376"/>
+                </a:solidFill>
+              </a:defRPr>
+            </a:pPr>
+            <a:r>
+              <a:t>Appointment Scheduling AI Agent | 19</a:t>
             </a:r>
           </a:p>
         </p:txBody>
@@ -4910,8 +6253,8 @@
         </p:nvSpPr>
         <p:spPr>
           <a:xfrm>
-            <a:off x="594360" y="502920"/>
-            <a:ext cx="10789920" cy="731520"/>
+            <a:off x="594360" y="411480"/>
+            <a:ext cx="10881360" cy="685800"/>
           </a:xfrm>
           <a:prstGeom prst="rect">
             <a:avLst/>
@@ -4925,7 +6268,7 @@
           <a:lstStyle/>
           <a:p>
             <a:pPr>
-              <a:defRPr sz="3400" b="1">
+              <a:defRPr sz="3100" b="1">
                 <a:solidFill>
                   <a:srgbClr val="172033"/>
                 </a:solidFill>
@@ -4945,8 +6288,61 @@
         </p:nvSpPr>
         <p:spPr>
           <a:xfrm>
-            <a:off x="777240" y="1508760"/>
-            <a:ext cx="10607040" cy="4480560"/>
+            <a:off x="777240" y="1234440"/>
+            <a:ext cx="10607040" cy="4800600"/>
+          </a:xfrm>
+          <a:prstGeom prst="rect">
+            <a:avLst/>
+          </a:prstGeom>
+          <a:noFill/>
+        </p:spPr>
+        <p:txBody>
+          <a:bodyPr wrap="square">
+            <a:spAutoFit/>
+          </a:bodyPr>
+          <a:lstStyle/>
+          <a:p>
+            <a:pPr>
+              <a:spcAft>
+                <a:spcPts val="700"/>
+              </a:spcAft>
+              <a:defRPr sz="2200">
+                <a:solidFill>
+                  <a:srgbClr val="172033"/>
+                </a:solidFill>
+              </a:defRPr>
+            </a:pPr>
+            <a:r>
+              <a:t>Patients need a calm scheduling experience that can handle incomplete information, frustration, and voice input.</a:t>
+            </a:r>
+          </a:p>
+          <a:p>
+            <a:pPr>
+              <a:spcAft>
+                <a:spcPts val="700"/>
+              </a:spcAft>
+              <a:defRPr sz="2200">
+                <a:solidFill>
+                  <a:srgbClr val="172033"/>
+                </a:solidFill>
+              </a:defRPr>
+            </a:pPr>
+            <a:r>
+              <a:t>The system must be safe because scheduling changes affect real-world commitments.</a:t>
+            </a:r>
+          </a:p>
+        </p:txBody>
+      </p:sp>
+      <p:sp>
+        <p:nvSpPr>
+          <p:cNvPr id="5" name="TextBox 4"/>
+          <p:cNvSpPr txBox="1"/>
+          <p:nvPr/>
+        </p:nvSpPr>
+        <p:spPr>
+          <a:xfrm>
+            <a:off x="777240" y="6263640"/>
+            <a:ext cx="10607040" cy="274320"/>
           </a:xfrm>
           <a:prstGeom prst="rect">
             <a:avLst/>
@@ -4960,32 +6356,306 @@
           <a:lstStyle/>
           <a:p>
             <a:pPr>
-              <a:spcAft>
-                <a:spcPts val="1200"/>
-              </a:spcAft>
-              <a:defRPr sz="1900">
+              <a:defRPr sz="1000">
+                <a:solidFill>
+                  <a:srgbClr val="586376"/>
+                </a:solidFill>
+              </a:defRPr>
+            </a:pPr>
+            <a:r>
+              <a:t>Appointment Scheduling AI Agent | 2</a:t>
+            </a:r>
+          </a:p>
+        </p:txBody>
+      </p:sp>
+    </p:spTree>
+  </p:cSld>
+  <p:clrMapOvr>
+    <a:masterClrMapping/>
+  </p:clrMapOvr>
+</p:sld>
+</file>
+
+<file path=ppt/slides/slide20.xml><?xml version="1.0" encoding="utf-8"?>
+<p:sld xmlns:a="http://schemas.openxmlformats.org/drawingml/2006/main" xmlns:p="http://schemas.openxmlformats.org/presentationml/2006/main" xmlns:r="http://schemas.openxmlformats.org/officeDocument/2006/relationships">
+  <p:cSld>
+    <p:bg>
+      <p:bgPr>
+        <a:solidFill>
+          <a:srgbClr val="F7F8FB"/>
+        </a:solidFill>
+        <a:effectLst/>
+      </p:bgPr>
+    </p:bg>
+    <p:spTree>
+      <p:nvGrpSpPr>
+        <p:cNvPr id="1" name=""/>
+        <p:cNvGrpSpPr/>
+        <p:nvPr/>
+      </p:nvGrpSpPr>
+      <p:grpSpPr/>
+      <p:sp>
+        <p:nvSpPr>
+          <p:cNvPr id="2" name="Rectangle 1"/>
+          <p:cNvSpPr/>
+          <p:nvPr/>
+        </p:nvSpPr>
+        <p:spPr>
+          <a:xfrm>
+            <a:off x="0" y="0"/>
+            <a:ext cx="128016" cy="6858000"/>
+          </a:xfrm>
+          <a:prstGeom prst="rect">
+            <a:avLst/>
+          </a:prstGeom>
+          <a:solidFill>
+            <a:srgbClr val="0F766E"/>
+          </a:solidFill>
+          <a:ln>
+            <a:noFill/>
+          </a:ln>
+        </p:spPr>
+        <p:style>
+          <a:lnRef idx="1">
+            <a:schemeClr val="accent1"/>
+          </a:lnRef>
+          <a:fillRef idx="3">
+            <a:schemeClr val="accent1"/>
+          </a:fillRef>
+          <a:effectRef idx="2">
+            <a:schemeClr val="accent1"/>
+          </a:effectRef>
+          <a:fontRef idx="minor">
+            <a:schemeClr val="lt1"/>
+          </a:fontRef>
+        </p:style>
+        <p:txBody>
+          <a:bodyPr rtlCol="0" anchor="ctr"/>
+          <a:lstStyle/>
+          <a:p>
+            <a:pPr algn="ctr"/>
+          </a:p>
+        </p:txBody>
+      </p:sp>
+      <p:sp>
+        <p:nvSpPr>
+          <p:cNvPr id="3" name="TextBox 2"/>
+          <p:cNvSpPr txBox="1"/>
+          <p:nvPr/>
+        </p:nvSpPr>
+        <p:spPr>
+          <a:xfrm>
+            <a:off x="594360" y="411480"/>
+            <a:ext cx="10881360" cy="685800"/>
+          </a:xfrm>
+          <a:prstGeom prst="rect">
+            <a:avLst/>
+          </a:prstGeom>
+          <a:noFill/>
+        </p:spPr>
+        <p:txBody>
+          <a:bodyPr wrap="none">
+            <a:spAutoFit/>
+          </a:bodyPr>
+          <a:lstStyle/>
+          <a:p>
+            <a:pPr>
+              <a:defRPr sz="2700" b="1">
                 <a:solidFill>
                   <a:srgbClr val="172033"/>
                 </a:solidFill>
               </a:defRPr>
             </a:pPr>
             <a:r>
-              <a:t>Patients need a calm scheduling experience that handles incomplete information, frustration, and voice input.</a:t>
-            </a:r>
-          </a:p>
-          <a:p>
-            <a:pPr>
-              <a:spcAft>
-                <a:spcPts val="1200"/>
-              </a:spcAft>
-              <a:defRPr sz="1900">
-                <a:solidFill>
-                  <a:srgbClr val="586376"/>
-                </a:solidFill>
-              </a:defRPr>
-            </a:pPr>
-            <a:r>
-              <a:t>Scheduling changes affect real commitments, so the system needs validation, auditability, and confirmation.</a:t>
+              <a:t>Production Readiness Checklist</a:t>
+            </a:r>
+          </a:p>
+        </p:txBody>
+      </p:sp>
+      <p:sp>
+        <p:nvSpPr>
+          <p:cNvPr id="4" name="TextBox 3"/>
+          <p:cNvSpPr txBox="1"/>
+          <p:nvPr/>
+        </p:nvSpPr>
+        <p:spPr>
+          <a:xfrm>
+            <a:off x="777240" y="1234440"/>
+            <a:ext cx="10607040" cy="4800600"/>
+          </a:xfrm>
+          <a:prstGeom prst="rect">
+            <a:avLst/>
+          </a:prstGeom>
+          <a:noFill/>
+        </p:spPr>
+        <p:txBody>
+          <a:bodyPr wrap="square">
+            <a:spAutoFit/>
+          </a:bodyPr>
+          <a:lstStyle/>
+          <a:p>
+            <a:pPr>
+              <a:spcAft>
+                <a:spcPts val="700"/>
+              </a:spcAft>
+              <a:defRPr sz="1700">
+                <a:solidFill>
+                  <a:srgbClr val="586376"/>
+                </a:solidFill>
+              </a:defRPr>
+            </a:pPr>
+            <a:r>
+              <a:t>Real scheduling backend</a:t>
+            </a:r>
+          </a:p>
+          <a:p>
+            <a:pPr>
+              <a:spcAft>
+                <a:spcPts val="700"/>
+              </a:spcAft>
+              <a:defRPr sz="1700">
+                <a:solidFill>
+                  <a:srgbClr val="586376"/>
+                </a:solidFill>
+              </a:defRPr>
+            </a:pPr>
+            <a:r>
+              <a:t>Durable session store</a:t>
+            </a:r>
+          </a:p>
+          <a:p>
+            <a:pPr>
+              <a:spcAft>
+                <a:spcPts val="700"/>
+              </a:spcAft>
+              <a:defRPr sz="1700">
+                <a:solidFill>
+                  <a:srgbClr val="586376"/>
+                </a:solidFill>
+              </a:defRPr>
+            </a:pPr>
+            <a:r>
+              <a:t>Durable audit log</a:t>
+            </a:r>
+          </a:p>
+          <a:p>
+            <a:pPr>
+              <a:spcAft>
+                <a:spcPts val="700"/>
+              </a:spcAft>
+              <a:defRPr sz="1700">
+                <a:solidFill>
+                  <a:srgbClr val="586376"/>
+                </a:solidFill>
+              </a:defRPr>
+            </a:pPr>
+            <a:r>
+              <a:t>Auth and user identity</a:t>
+            </a:r>
+          </a:p>
+          <a:p>
+            <a:pPr>
+              <a:spcAft>
+                <a:spcPts val="700"/>
+              </a:spcAft>
+              <a:defRPr sz="1700">
+                <a:solidFill>
+                  <a:srgbClr val="586376"/>
+                </a:solidFill>
+              </a:defRPr>
+            </a:pPr>
+            <a:r>
+              <a:t>Monitoring and alerting</a:t>
+            </a:r>
+          </a:p>
+          <a:p>
+            <a:pPr>
+              <a:spcAft>
+                <a:spcPts val="700"/>
+              </a:spcAft>
+              <a:defRPr sz="1700">
+                <a:solidFill>
+                  <a:srgbClr val="586376"/>
+                </a:solidFill>
+              </a:defRPr>
+            </a:pPr>
+            <a:r>
+              <a:t>Retry, timeout, and circuit breaker policies</a:t>
+            </a:r>
+          </a:p>
+          <a:p>
+            <a:pPr>
+              <a:spcAft>
+                <a:spcPts val="700"/>
+              </a:spcAft>
+              <a:defRPr sz="1700">
+                <a:solidFill>
+                  <a:srgbClr val="586376"/>
+                </a:solidFill>
+              </a:defRPr>
+            </a:pPr>
+            <a:r>
+              <a:t>Load testing</a:t>
+            </a:r>
+          </a:p>
+          <a:p>
+            <a:pPr>
+              <a:spcAft>
+                <a:spcPts val="700"/>
+              </a:spcAft>
+              <a:defRPr sz="1700">
+                <a:solidFill>
+                  <a:srgbClr val="586376"/>
+                </a:solidFill>
+              </a:defRPr>
+            </a:pPr>
+            <a:r>
+              <a:t>Security review</a:t>
+            </a:r>
+          </a:p>
+          <a:p>
+            <a:pPr>
+              <a:spcAft>
+                <a:spcPts val="700"/>
+              </a:spcAft>
+              <a:defRPr sz="1700">
+                <a:solidFill>
+                  <a:srgbClr val="586376"/>
+                </a:solidFill>
+              </a:defRPr>
+            </a:pPr>
+            <a:r>
+              <a:t>Prompt and tool-call evals</a:t>
+            </a:r>
+          </a:p>
+          <a:p>
+            <a:pPr>
+              <a:spcAft>
+                <a:spcPts val="700"/>
+              </a:spcAft>
+              <a:defRPr sz="1700">
+                <a:solidFill>
+                  <a:srgbClr val="586376"/>
+                </a:solidFill>
+              </a:defRPr>
+            </a:pPr>
+            <a:r>
+              <a:t>Human handoff process</a:t>
+            </a:r>
+          </a:p>
+          <a:p>
+            <a:pPr>
+              <a:spcAft>
+                <a:spcPts val="700"/>
+              </a:spcAft>
+              <a:defRPr sz="1700">
+                <a:solidFill>
+                  <a:srgbClr val="586376"/>
+                </a:solidFill>
+              </a:defRPr>
+            </a:pPr>
+            <a:r>
+              <a:t>Runbooks for incidents</a:t>
             </a:r>
           </a:p>
         </p:txBody>
@@ -5020,7 +6690,1357 @@
               </a:defRPr>
             </a:pPr>
             <a:r>
-              <a:t>Appointment Scheduling AI Agent | 2</a:t>
+              <a:t>Appointment Scheduling AI Agent | 20</a:t>
+            </a:r>
+          </a:p>
+        </p:txBody>
+      </p:sp>
+    </p:spTree>
+  </p:cSld>
+  <p:clrMapOvr>
+    <a:masterClrMapping/>
+  </p:clrMapOvr>
+</p:sld>
+</file>
+
+<file path=ppt/slides/slide21.xml><?xml version="1.0" encoding="utf-8"?>
+<p:sld xmlns:a="http://schemas.openxmlformats.org/drawingml/2006/main" xmlns:p="http://schemas.openxmlformats.org/presentationml/2006/main" xmlns:r="http://schemas.openxmlformats.org/officeDocument/2006/relationships">
+  <p:cSld>
+    <p:bg>
+      <p:bgPr>
+        <a:solidFill>
+          <a:srgbClr val="F7F8FB"/>
+        </a:solidFill>
+        <a:effectLst/>
+      </p:bgPr>
+    </p:bg>
+    <p:spTree>
+      <p:nvGrpSpPr>
+        <p:cNvPr id="1" name=""/>
+        <p:cNvGrpSpPr/>
+        <p:nvPr/>
+      </p:nvGrpSpPr>
+      <p:grpSpPr/>
+      <p:sp>
+        <p:nvSpPr>
+          <p:cNvPr id="2" name="Rectangle 1"/>
+          <p:cNvSpPr/>
+          <p:nvPr/>
+        </p:nvSpPr>
+        <p:spPr>
+          <a:xfrm>
+            <a:off x="0" y="0"/>
+            <a:ext cx="128016" cy="6858000"/>
+          </a:xfrm>
+          <a:prstGeom prst="rect">
+            <a:avLst/>
+          </a:prstGeom>
+          <a:solidFill>
+            <a:srgbClr val="0F766E"/>
+          </a:solidFill>
+          <a:ln>
+            <a:noFill/>
+          </a:ln>
+        </p:spPr>
+        <p:style>
+          <a:lnRef idx="1">
+            <a:schemeClr val="accent1"/>
+          </a:lnRef>
+          <a:fillRef idx="3">
+            <a:schemeClr val="accent1"/>
+          </a:fillRef>
+          <a:effectRef idx="2">
+            <a:schemeClr val="accent1"/>
+          </a:effectRef>
+          <a:fontRef idx="minor">
+            <a:schemeClr val="lt1"/>
+          </a:fontRef>
+        </p:style>
+        <p:txBody>
+          <a:bodyPr rtlCol="0" anchor="ctr"/>
+          <a:lstStyle/>
+          <a:p>
+            <a:pPr algn="ctr"/>
+          </a:p>
+        </p:txBody>
+      </p:sp>
+      <p:sp>
+        <p:nvSpPr>
+          <p:cNvPr id="3" name="TextBox 2"/>
+          <p:cNvSpPr txBox="1"/>
+          <p:nvPr/>
+        </p:nvSpPr>
+        <p:spPr>
+          <a:xfrm>
+            <a:off x="594360" y="411480"/>
+            <a:ext cx="10881360" cy="685800"/>
+          </a:xfrm>
+          <a:prstGeom prst="rect">
+            <a:avLst/>
+          </a:prstGeom>
+          <a:noFill/>
+        </p:spPr>
+        <p:txBody>
+          <a:bodyPr wrap="none">
+            <a:spAutoFit/>
+          </a:bodyPr>
+          <a:lstStyle/>
+          <a:p>
+            <a:pPr>
+              <a:defRPr sz="3100" b="1">
+                <a:solidFill>
+                  <a:srgbClr val="172033"/>
+                </a:solidFill>
+              </a:defRPr>
+            </a:pPr>
+            <a:r>
+              <a:t>Coding Interview Framing</a:t>
+            </a:r>
+          </a:p>
+        </p:txBody>
+      </p:sp>
+      <p:sp>
+        <p:nvSpPr>
+          <p:cNvPr id="4" name="TextBox 3"/>
+          <p:cNvSpPr txBox="1"/>
+          <p:nvPr/>
+        </p:nvSpPr>
+        <p:spPr>
+          <a:xfrm>
+            <a:off x="777240" y="1234440"/>
+            <a:ext cx="10607040" cy="4800600"/>
+          </a:xfrm>
+          <a:prstGeom prst="rect">
+            <a:avLst/>
+          </a:prstGeom>
+          <a:noFill/>
+        </p:spPr>
+        <p:txBody>
+          <a:bodyPr wrap="square">
+            <a:spAutoFit/>
+          </a:bodyPr>
+          <a:lstStyle/>
+          <a:p>
+            <a:pPr>
+              <a:spcAft>
+                <a:spcPts val="700"/>
+              </a:spcAft>
+              <a:defRPr sz="2200">
+                <a:solidFill>
+                  <a:srgbClr val="172033"/>
+                </a:solidFill>
+              </a:defRPr>
+            </a:pPr>
+            <a:r>
+              <a:t>How I would communicate:</a:t>
+            </a:r>
+          </a:p>
+          <a:p>
+            <a:pPr>
+              <a:spcAft>
+                <a:spcPts val="700"/>
+              </a:spcAft>
+              <a:defRPr sz="2100">
+                <a:solidFill>
+                  <a:srgbClr val="586376"/>
+                </a:solidFill>
+              </a:defRPr>
+            </a:pPr>
+            <a:r>
+              <a:t>Clarify requirements first</a:t>
+            </a:r>
+          </a:p>
+          <a:p>
+            <a:pPr>
+              <a:spcAft>
+                <a:spcPts val="700"/>
+              </a:spcAft>
+              <a:defRPr sz="2100">
+                <a:solidFill>
+                  <a:srgbClr val="586376"/>
+                </a:solidFill>
+              </a:defRPr>
+            </a:pPr>
+            <a:r>
+              <a:t>State assumptions</a:t>
+            </a:r>
+          </a:p>
+          <a:p>
+            <a:pPr>
+              <a:spcAft>
+                <a:spcPts val="700"/>
+              </a:spcAft>
+              <a:defRPr sz="2100">
+                <a:solidFill>
+                  <a:srgbClr val="586376"/>
+                </a:solidFill>
+              </a:defRPr>
+            </a:pPr>
+            <a:r>
+              <a:t>Keep implementation small and readable</a:t>
+            </a:r>
+          </a:p>
+          <a:p>
+            <a:pPr>
+              <a:spcAft>
+                <a:spcPts val="700"/>
+              </a:spcAft>
+              <a:defRPr sz="2100">
+                <a:solidFill>
+                  <a:srgbClr val="586376"/>
+                </a:solidFill>
+              </a:defRPr>
+            </a:pPr>
+            <a:r>
+              <a:t>Explain tradeoffs</a:t>
+            </a:r>
+          </a:p>
+          <a:p>
+            <a:pPr>
+              <a:spcAft>
+                <a:spcPts val="700"/>
+              </a:spcAft>
+              <a:defRPr sz="2100">
+                <a:solidFill>
+                  <a:srgbClr val="586376"/>
+                </a:solidFill>
+              </a:defRPr>
+            </a:pPr>
+            <a:r>
+              <a:t>Test critical invariants</a:t>
+            </a:r>
+          </a:p>
+          <a:p>
+            <a:pPr>
+              <a:spcAft>
+                <a:spcPts val="700"/>
+              </a:spcAft>
+              <a:defRPr sz="2100">
+                <a:solidFill>
+                  <a:srgbClr val="586376"/>
+                </a:solidFill>
+              </a:defRPr>
+            </a:pPr>
+            <a:r>
+              <a:t>Debug from narrow, observable signals</a:t>
+            </a:r>
+          </a:p>
+        </p:txBody>
+      </p:sp>
+      <p:sp>
+        <p:nvSpPr>
+          <p:cNvPr id="5" name="TextBox 4"/>
+          <p:cNvSpPr txBox="1"/>
+          <p:nvPr/>
+        </p:nvSpPr>
+        <p:spPr>
+          <a:xfrm>
+            <a:off x="777240" y="6263640"/>
+            <a:ext cx="10607040" cy="274320"/>
+          </a:xfrm>
+          <a:prstGeom prst="rect">
+            <a:avLst/>
+          </a:prstGeom>
+          <a:noFill/>
+        </p:spPr>
+        <p:txBody>
+          <a:bodyPr wrap="none">
+            <a:spAutoFit/>
+          </a:bodyPr>
+          <a:lstStyle/>
+          <a:p>
+            <a:pPr>
+              <a:defRPr sz="1000">
+                <a:solidFill>
+                  <a:srgbClr val="586376"/>
+                </a:solidFill>
+              </a:defRPr>
+            </a:pPr>
+            <a:r>
+              <a:t>Appointment Scheduling AI Agent | 21</a:t>
+            </a:r>
+          </a:p>
+        </p:txBody>
+      </p:sp>
+    </p:spTree>
+  </p:cSld>
+  <p:clrMapOvr>
+    <a:masterClrMapping/>
+  </p:clrMapOvr>
+</p:sld>
+</file>
+
+<file path=ppt/slides/slide22.xml><?xml version="1.0" encoding="utf-8"?>
+<p:sld xmlns:a="http://schemas.openxmlformats.org/drawingml/2006/main" xmlns:p="http://schemas.openxmlformats.org/presentationml/2006/main" xmlns:r="http://schemas.openxmlformats.org/officeDocument/2006/relationships">
+  <p:cSld>
+    <p:bg>
+      <p:bgPr>
+        <a:solidFill>
+          <a:srgbClr val="F7F8FB"/>
+        </a:solidFill>
+        <a:effectLst/>
+      </p:bgPr>
+    </p:bg>
+    <p:spTree>
+      <p:nvGrpSpPr>
+        <p:cNvPr id="1" name=""/>
+        <p:cNvGrpSpPr/>
+        <p:nvPr/>
+      </p:nvGrpSpPr>
+      <p:grpSpPr/>
+      <p:sp>
+        <p:nvSpPr>
+          <p:cNvPr id="2" name="Rectangle 1"/>
+          <p:cNvSpPr/>
+          <p:nvPr/>
+        </p:nvSpPr>
+        <p:spPr>
+          <a:xfrm>
+            <a:off x="0" y="0"/>
+            <a:ext cx="128016" cy="6858000"/>
+          </a:xfrm>
+          <a:prstGeom prst="rect">
+            <a:avLst/>
+          </a:prstGeom>
+          <a:solidFill>
+            <a:srgbClr val="0F766E"/>
+          </a:solidFill>
+          <a:ln>
+            <a:noFill/>
+          </a:ln>
+        </p:spPr>
+        <p:style>
+          <a:lnRef idx="1">
+            <a:schemeClr val="accent1"/>
+          </a:lnRef>
+          <a:fillRef idx="3">
+            <a:schemeClr val="accent1"/>
+          </a:fillRef>
+          <a:effectRef idx="2">
+            <a:schemeClr val="accent1"/>
+          </a:effectRef>
+          <a:fontRef idx="minor">
+            <a:schemeClr val="lt1"/>
+          </a:fontRef>
+        </p:style>
+        <p:txBody>
+          <a:bodyPr rtlCol="0" anchor="ctr"/>
+          <a:lstStyle/>
+          <a:p>
+            <a:pPr algn="ctr"/>
+          </a:p>
+        </p:txBody>
+      </p:sp>
+      <p:sp>
+        <p:nvSpPr>
+          <p:cNvPr id="3" name="TextBox 2"/>
+          <p:cNvSpPr txBox="1"/>
+          <p:nvPr/>
+        </p:nvSpPr>
+        <p:spPr>
+          <a:xfrm>
+            <a:off x="594360" y="411480"/>
+            <a:ext cx="10881360" cy="685800"/>
+          </a:xfrm>
+          <a:prstGeom prst="rect">
+            <a:avLst/>
+          </a:prstGeom>
+          <a:noFill/>
+        </p:spPr>
+        <p:txBody>
+          <a:bodyPr wrap="none">
+            <a:spAutoFit/>
+          </a:bodyPr>
+          <a:lstStyle/>
+          <a:p>
+            <a:pPr>
+              <a:defRPr sz="3100" b="1">
+                <a:solidFill>
+                  <a:srgbClr val="172033"/>
+                </a:solidFill>
+              </a:defRPr>
+            </a:pPr>
+            <a:r>
+              <a:t>System Design Framing</a:t>
+            </a:r>
+          </a:p>
+        </p:txBody>
+      </p:sp>
+      <p:sp>
+        <p:nvSpPr>
+          <p:cNvPr id="4" name="TextBox 3"/>
+          <p:cNvSpPr txBox="1"/>
+          <p:nvPr/>
+        </p:nvSpPr>
+        <p:spPr>
+          <a:xfrm>
+            <a:off x="777240" y="1234440"/>
+            <a:ext cx="10607040" cy="4800600"/>
+          </a:xfrm>
+          <a:prstGeom prst="rect">
+            <a:avLst/>
+          </a:prstGeom>
+          <a:noFill/>
+        </p:spPr>
+        <p:txBody>
+          <a:bodyPr wrap="square">
+            <a:spAutoFit/>
+          </a:bodyPr>
+          <a:lstStyle/>
+          <a:p>
+            <a:pPr>
+              <a:spcAft>
+                <a:spcPts val="700"/>
+              </a:spcAft>
+              <a:defRPr sz="2200">
+                <a:solidFill>
+                  <a:srgbClr val="172033"/>
+                </a:solidFill>
+              </a:defRPr>
+            </a:pPr>
+            <a:r>
+              <a:t>How I would discuss scaling:</a:t>
+            </a:r>
+          </a:p>
+          <a:p>
+            <a:pPr>
+              <a:spcAft>
+                <a:spcPts val="700"/>
+              </a:spcAft>
+              <a:defRPr sz="2100">
+                <a:solidFill>
+                  <a:srgbClr val="586376"/>
+                </a:solidFill>
+              </a:defRPr>
+            </a:pPr>
+            <a:r>
+              <a:t>Start with requirements and success metrics</a:t>
+            </a:r>
+          </a:p>
+          <a:p>
+            <a:pPr>
+              <a:spcAft>
+                <a:spcPts val="700"/>
+              </a:spcAft>
+              <a:defRPr sz="2100">
+                <a:solidFill>
+                  <a:srgbClr val="586376"/>
+                </a:solidFill>
+              </a:defRPr>
+            </a:pPr>
+            <a:r>
+              <a:t>Separate chat, orchestration, tools, and scheduling backend</a:t>
+            </a:r>
+          </a:p>
+          <a:p>
+            <a:pPr>
+              <a:spcAft>
+                <a:spcPts val="700"/>
+              </a:spcAft>
+              <a:defRPr sz="2100">
+                <a:solidFill>
+                  <a:srgbClr val="586376"/>
+                </a:solidFill>
+              </a:defRPr>
+            </a:pPr>
+            <a:r>
+              <a:t>Make API services stateless</a:t>
+            </a:r>
+          </a:p>
+          <a:p>
+            <a:pPr>
+              <a:spcAft>
+                <a:spcPts val="700"/>
+              </a:spcAft>
+              <a:defRPr sz="2100">
+                <a:solidFill>
+                  <a:srgbClr val="586376"/>
+                </a:solidFill>
+              </a:defRPr>
+            </a:pPr>
+            <a:r>
+              <a:t>Move state to durable stores</a:t>
+            </a:r>
+          </a:p>
+          <a:p>
+            <a:pPr>
+              <a:spcAft>
+                <a:spcPts val="700"/>
+              </a:spcAft>
+              <a:defRPr sz="2100">
+                <a:solidFill>
+                  <a:srgbClr val="586376"/>
+                </a:solidFill>
+              </a:defRPr>
+            </a:pPr>
+            <a:r>
+              <a:t>Protect state-changing operations with transactions</a:t>
+            </a:r>
+          </a:p>
+          <a:p>
+            <a:pPr>
+              <a:spcAft>
+                <a:spcPts val="700"/>
+              </a:spcAft>
+              <a:defRPr sz="2100">
+                <a:solidFill>
+                  <a:srgbClr val="586376"/>
+                </a:solidFill>
+              </a:defRPr>
+            </a:pPr>
+            <a:r>
+              <a:t>Add observability, retries, and human handoff</a:t>
+            </a:r>
+          </a:p>
+        </p:txBody>
+      </p:sp>
+      <p:sp>
+        <p:nvSpPr>
+          <p:cNvPr id="5" name="TextBox 4"/>
+          <p:cNvSpPr txBox="1"/>
+          <p:nvPr/>
+        </p:nvSpPr>
+        <p:spPr>
+          <a:xfrm>
+            <a:off x="777240" y="6263640"/>
+            <a:ext cx="10607040" cy="274320"/>
+          </a:xfrm>
+          <a:prstGeom prst="rect">
+            <a:avLst/>
+          </a:prstGeom>
+          <a:noFill/>
+        </p:spPr>
+        <p:txBody>
+          <a:bodyPr wrap="none">
+            <a:spAutoFit/>
+          </a:bodyPr>
+          <a:lstStyle/>
+          <a:p>
+            <a:pPr>
+              <a:defRPr sz="1000">
+                <a:solidFill>
+                  <a:srgbClr val="586376"/>
+                </a:solidFill>
+              </a:defRPr>
+            </a:pPr>
+            <a:r>
+              <a:t>Appointment Scheduling AI Agent | 22</a:t>
+            </a:r>
+          </a:p>
+        </p:txBody>
+      </p:sp>
+    </p:spTree>
+  </p:cSld>
+  <p:clrMapOvr>
+    <a:masterClrMapping/>
+  </p:clrMapOvr>
+</p:sld>
+</file>
+
+<file path=ppt/slides/slide23.xml><?xml version="1.0" encoding="utf-8"?>
+<p:sld xmlns:a="http://schemas.openxmlformats.org/drawingml/2006/main" xmlns:p="http://schemas.openxmlformats.org/presentationml/2006/main" xmlns:r="http://schemas.openxmlformats.org/officeDocument/2006/relationships">
+  <p:cSld>
+    <p:bg>
+      <p:bgPr>
+        <a:solidFill>
+          <a:srgbClr val="F7F8FB"/>
+        </a:solidFill>
+        <a:effectLst/>
+      </p:bgPr>
+    </p:bg>
+    <p:spTree>
+      <p:nvGrpSpPr>
+        <p:cNvPr id="1" name=""/>
+        <p:cNvGrpSpPr/>
+        <p:nvPr/>
+      </p:nvGrpSpPr>
+      <p:grpSpPr/>
+      <p:sp>
+        <p:nvSpPr>
+          <p:cNvPr id="2" name="Rectangle 1"/>
+          <p:cNvSpPr/>
+          <p:nvPr/>
+        </p:nvSpPr>
+        <p:spPr>
+          <a:xfrm>
+            <a:off x="0" y="0"/>
+            <a:ext cx="128016" cy="6858000"/>
+          </a:xfrm>
+          <a:prstGeom prst="rect">
+            <a:avLst/>
+          </a:prstGeom>
+          <a:solidFill>
+            <a:srgbClr val="0F766E"/>
+          </a:solidFill>
+          <a:ln>
+            <a:noFill/>
+          </a:ln>
+        </p:spPr>
+        <p:style>
+          <a:lnRef idx="1">
+            <a:schemeClr val="accent1"/>
+          </a:lnRef>
+          <a:fillRef idx="3">
+            <a:schemeClr val="accent1"/>
+          </a:fillRef>
+          <a:effectRef idx="2">
+            <a:schemeClr val="accent1"/>
+          </a:effectRef>
+          <a:fontRef idx="minor">
+            <a:schemeClr val="lt1"/>
+          </a:fontRef>
+        </p:style>
+        <p:txBody>
+          <a:bodyPr rtlCol="0" anchor="ctr"/>
+          <a:lstStyle/>
+          <a:p>
+            <a:pPr algn="ctr"/>
+          </a:p>
+        </p:txBody>
+      </p:sp>
+      <p:sp>
+        <p:nvSpPr>
+          <p:cNvPr id="3" name="TextBox 2"/>
+          <p:cNvSpPr txBox="1"/>
+          <p:nvPr/>
+        </p:nvSpPr>
+        <p:spPr>
+          <a:xfrm>
+            <a:off x="594360" y="411480"/>
+            <a:ext cx="10881360" cy="685800"/>
+          </a:xfrm>
+          <a:prstGeom prst="rect">
+            <a:avLst/>
+          </a:prstGeom>
+          <a:noFill/>
+        </p:spPr>
+        <p:txBody>
+          <a:bodyPr wrap="none">
+            <a:spAutoFit/>
+          </a:bodyPr>
+          <a:lstStyle/>
+          <a:p>
+            <a:pPr>
+              <a:defRPr sz="3100" b="1">
+                <a:solidFill>
+                  <a:srgbClr val="172033"/>
+                </a:solidFill>
+              </a:defRPr>
+            </a:pPr>
+            <a:r>
+              <a:t>Demo Walkthrough</a:t>
+            </a:r>
+          </a:p>
+        </p:txBody>
+      </p:sp>
+      <p:sp>
+        <p:nvSpPr>
+          <p:cNvPr id="4" name="TextBox 3"/>
+          <p:cNvSpPr txBox="1"/>
+          <p:nvPr/>
+        </p:nvSpPr>
+        <p:spPr>
+          <a:xfrm>
+            <a:off x="777240" y="1234440"/>
+            <a:ext cx="10607040" cy="4800600"/>
+          </a:xfrm>
+          <a:prstGeom prst="rect">
+            <a:avLst/>
+          </a:prstGeom>
+          <a:noFill/>
+        </p:spPr>
+        <p:txBody>
+          <a:bodyPr wrap="square">
+            <a:spAutoFit/>
+          </a:bodyPr>
+          <a:lstStyle/>
+          <a:p>
+            <a:pPr>
+              <a:spcAft>
+                <a:spcPts val="700"/>
+              </a:spcAft>
+              <a:defRPr sz="1700">
+                <a:solidFill>
+                  <a:srgbClr val="172033"/>
+                </a:solidFill>
+              </a:defRPr>
+            </a:pPr>
+            <a:r>
+              <a:t>Demo path:</a:t>
+            </a:r>
+          </a:p>
+          <a:p>
+            <a:pPr>
+              <a:spcAft>
+                <a:spcPts val="700"/>
+              </a:spcAft>
+              <a:defRPr sz="1700">
+                <a:solidFill>
+                  <a:srgbClr val="172033"/>
+                </a:solidFill>
+              </a:defRPr>
+            </a:pPr>
+            <a:r>
+              <a:t>1. Open browser UI</a:t>
+            </a:r>
+          </a:p>
+          <a:p>
+            <a:pPr>
+              <a:spcAft>
+                <a:spcPts val="700"/>
+              </a:spcAft>
+              <a:defRPr sz="1700">
+                <a:solidFill>
+                  <a:srgbClr val="172033"/>
+                </a:solidFill>
+              </a:defRPr>
+            </a:pPr>
+            <a:r>
+              <a:t>2. Ask for an appointment</a:t>
+            </a:r>
+          </a:p>
+          <a:p>
+            <a:pPr>
+              <a:spcAft>
+                <a:spcPts val="700"/>
+              </a:spcAft>
+              <a:defRPr sz="1700">
+                <a:solidFill>
+                  <a:srgbClr val="172033"/>
+                </a:solidFill>
+              </a:defRPr>
+            </a:pPr>
+            <a:r>
+              <a:t>3. Search slots</a:t>
+            </a:r>
+          </a:p>
+          <a:p>
+            <a:pPr>
+              <a:spcAft>
+                <a:spcPts val="700"/>
+              </a:spcAft>
+              <a:defRPr sz="1700">
+                <a:solidFill>
+                  <a:srgbClr val="172033"/>
+                </a:solidFill>
+              </a:defRPr>
+            </a:pPr>
+            <a:r>
+              <a:t>4. Hold selected slot</a:t>
+            </a:r>
+          </a:p>
+          <a:p>
+            <a:pPr>
+              <a:spcAft>
+                <a:spcPts val="700"/>
+              </a:spcAft>
+              <a:defRPr sz="1700">
+                <a:solidFill>
+                  <a:srgbClr val="172033"/>
+                </a:solidFill>
+              </a:defRPr>
+            </a:pPr>
+            <a:r>
+              <a:t>5. Confirm patient details</a:t>
+            </a:r>
+          </a:p>
+          <a:p>
+            <a:pPr>
+              <a:spcAft>
+                <a:spcPts val="700"/>
+              </a:spcAft>
+              <a:defRPr sz="1700">
+                <a:solidFill>
+                  <a:srgbClr val="172033"/>
+                </a:solidFill>
+              </a:defRPr>
+            </a:pPr>
+            <a:r>
+              <a:t>6. Book appointment</a:t>
+            </a:r>
+          </a:p>
+          <a:p>
+            <a:pPr>
+              <a:spcAft>
+                <a:spcPts val="700"/>
+              </a:spcAft>
+              <a:defRPr sz="1700">
+                <a:solidFill>
+                  <a:srgbClr val="172033"/>
+                </a:solidFill>
+              </a:defRPr>
+            </a:pPr>
+            <a:r>
+              <a:t>7. Show tool trace</a:t>
+            </a:r>
+          </a:p>
+          <a:p>
+            <a:pPr>
+              <a:spcAft>
+                <a:spcPts val="700"/>
+              </a:spcAft>
+              <a:defRPr sz="1700">
+                <a:solidFill>
+                  <a:srgbClr val="172033"/>
+                </a:solidFill>
+              </a:defRPr>
+            </a:pPr>
+            <a:r>
+              <a:t>8. Test emergency response</a:t>
+            </a:r>
+          </a:p>
+        </p:txBody>
+      </p:sp>
+      <p:sp>
+        <p:nvSpPr>
+          <p:cNvPr id="5" name="TextBox 4"/>
+          <p:cNvSpPr txBox="1"/>
+          <p:nvPr/>
+        </p:nvSpPr>
+        <p:spPr>
+          <a:xfrm>
+            <a:off x="777240" y="6263640"/>
+            <a:ext cx="10607040" cy="274320"/>
+          </a:xfrm>
+          <a:prstGeom prst="rect">
+            <a:avLst/>
+          </a:prstGeom>
+          <a:noFill/>
+        </p:spPr>
+        <p:txBody>
+          <a:bodyPr wrap="none">
+            <a:spAutoFit/>
+          </a:bodyPr>
+          <a:lstStyle/>
+          <a:p>
+            <a:pPr>
+              <a:defRPr sz="1000">
+                <a:solidFill>
+                  <a:srgbClr val="586376"/>
+                </a:solidFill>
+              </a:defRPr>
+            </a:pPr>
+            <a:r>
+              <a:t>Appointment Scheduling AI Agent | 23</a:t>
+            </a:r>
+          </a:p>
+        </p:txBody>
+      </p:sp>
+    </p:spTree>
+  </p:cSld>
+  <p:clrMapOvr>
+    <a:masterClrMapping/>
+  </p:clrMapOvr>
+</p:sld>
+</file>
+
+<file path=ppt/slides/slide24.xml><?xml version="1.0" encoding="utf-8"?>
+<p:sld xmlns:a="http://schemas.openxmlformats.org/drawingml/2006/main" xmlns:p="http://schemas.openxmlformats.org/presentationml/2006/main" xmlns:r="http://schemas.openxmlformats.org/officeDocument/2006/relationships">
+  <p:cSld>
+    <p:bg>
+      <p:bgPr>
+        <a:solidFill>
+          <a:srgbClr val="F7F8FB"/>
+        </a:solidFill>
+        <a:effectLst/>
+      </p:bgPr>
+    </p:bg>
+    <p:spTree>
+      <p:nvGrpSpPr>
+        <p:cNvPr id="1" name=""/>
+        <p:cNvGrpSpPr/>
+        <p:nvPr/>
+      </p:nvGrpSpPr>
+      <p:grpSpPr/>
+      <p:sp>
+        <p:nvSpPr>
+          <p:cNvPr id="2" name="Rectangle 1"/>
+          <p:cNvSpPr/>
+          <p:nvPr/>
+        </p:nvSpPr>
+        <p:spPr>
+          <a:xfrm>
+            <a:off x="0" y="0"/>
+            <a:ext cx="128016" cy="6858000"/>
+          </a:xfrm>
+          <a:prstGeom prst="rect">
+            <a:avLst/>
+          </a:prstGeom>
+          <a:solidFill>
+            <a:srgbClr val="0F766E"/>
+          </a:solidFill>
+          <a:ln>
+            <a:noFill/>
+          </a:ln>
+        </p:spPr>
+        <p:style>
+          <a:lnRef idx="1">
+            <a:schemeClr val="accent1"/>
+          </a:lnRef>
+          <a:fillRef idx="3">
+            <a:schemeClr val="accent1"/>
+          </a:fillRef>
+          <a:effectRef idx="2">
+            <a:schemeClr val="accent1"/>
+          </a:effectRef>
+          <a:fontRef idx="minor">
+            <a:schemeClr val="lt1"/>
+          </a:fontRef>
+        </p:style>
+        <p:txBody>
+          <a:bodyPr rtlCol="0" anchor="ctr"/>
+          <a:lstStyle/>
+          <a:p>
+            <a:pPr algn="ctr"/>
+          </a:p>
+        </p:txBody>
+      </p:sp>
+      <p:sp>
+        <p:nvSpPr>
+          <p:cNvPr id="3" name="TextBox 2"/>
+          <p:cNvSpPr txBox="1"/>
+          <p:nvPr/>
+        </p:nvSpPr>
+        <p:spPr>
+          <a:xfrm>
+            <a:off x="594360" y="411480"/>
+            <a:ext cx="10881360" cy="685800"/>
+          </a:xfrm>
+          <a:prstGeom prst="rect">
+            <a:avLst/>
+          </a:prstGeom>
+          <a:noFill/>
+        </p:spPr>
+        <p:txBody>
+          <a:bodyPr wrap="none">
+            <a:spAutoFit/>
+          </a:bodyPr>
+          <a:lstStyle/>
+          <a:p>
+            <a:pPr>
+              <a:defRPr sz="3100" b="1">
+                <a:solidFill>
+                  <a:srgbClr val="172033"/>
+                </a:solidFill>
+              </a:defRPr>
+            </a:pPr>
+            <a:r>
+              <a:t>Challenges</a:t>
+            </a:r>
+          </a:p>
+        </p:txBody>
+      </p:sp>
+      <p:sp>
+        <p:nvSpPr>
+          <p:cNvPr id="4" name="TextBox 3"/>
+          <p:cNvSpPr txBox="1"/>
+          <p:nvPr/>
+        </p:nvSpPr>
+        <p:spPr>
+          <a:xfrm>
+            <a:off x="777240" y="1234440"/>
+            <a:ext cx="10607040" cy="4800600"/>
+          </a:xfrm>
+          <a:prstGeom prst="rect">
+            <a:avLst/>
+          </a:prstGeom>
+          <a:noFill/>
+        </p:spPr>
+        <p:txBody>
+          <a:bodyPr wrap="square">
+            <a:spAutoFit/>
+          </a:bodyPr>
+          <a:lstStyle/>
+          <a:p>
+            <a:pPr>
+              <a:spcAft>
+                <a:spcPts val="700"/>
+              </a:spcAft>
+              <a:defRPr sz="2100">
+                <a:solidFill>
+                  <a:srgbClr val="586376"/>
+                </a:solidFill>
+              </a:defRPr>
+            </a:pPr>
+            <a:r>
+              <a:t>Preventing unsafe model actions</a:t>
+            </a:r>
+          </a:p>
+          <a:p>
+            <a:pPr>
+              <a:spcAft>
+                <a:spcPts val="700"/>
+              </a:spcAft>
+              <a:defRPr sz="2100">
+                <a:solidFill>
+                  <a:srgbClr val="586376"/>
+                </a:solidFill>
+              </a:defRPr>
+            </a:pPr>
+            <a:r>
+              <a:t>Handling partial patient information</a:t>
+            </a:r>
+          </a:p>
+          <a:p>
+            <a:pPr>
+              <a:spcAft>
+                <a:spcPts val="700"/>
+              </a:spcAft>
+              <a:defRPr sz="2100">
+                <a:solidFill>
+                  <a:srgbClr val="586376"/>
+                </a:solidFill>
+              </a:defRPr>
+            </a:pPr>
+            <a:r>
+              <a:t>Keeping voice responses TTS-friendly</a:t>
+            </a:r>
+          </a:p>
+          <a:p>
+            <a:pPr>
+              <a:spcAft>
+                <a:spcPts val="700"/>
+              </a:spcAft>
+              <a:defRPr sz="2100">
+                <a:solidFill>
+                  <a:srgbClr val="586376"/>
+                </a:solidFill>
+              </a:defRPr>
+            </a:pPr>
+            <a:r>
+              <a:t>Recovering from transient browser audio failures</a:t>
+            </a:r>
+          </a:p>
+          <a:p>
+            <a:pPr>
+              <a:spcAft>
+                <a:spcPts val="700"/>
+              </a:spcAft>
+              <a:defRPr sz="2100">
+                <a:solidFill>
+                  <a:srgbClr val="586376"/>
+                </a:solidFill>
+              </a:defRPr>
+            </a:pPr>
+            <a:r>
+              <a:t>Balancing demo simplicity with production realism</a:t>
+            </a:r>
+          </a:p>
+          <a:p>
+            <a:pPr>
+              <a:spcAft>
+                <a:spcPts val="700"/>
+              </a:spcAft>
+              <a:defRPr sz="2100">
+                <a:solidFill>
+                  <a:srgbClr val="586376"/>
+                </a:solidFill>
+              </a:defRPr>
+            </a:pPr>
+            <a:r>
+              <a:t>Explaining production gaps honestly</a:t>
+            </a:r>
+          </a:p>
+        </p:txBody>
+      </p:sp>
+      <p:sp>
+        <p:nvSpPr>
+          <p:cNvPr id="5" name="TextBox 4"/>
+          <p:cNvSpPr txBox="1"/>
+          <p:nvPr/>
+        </p:nvSpPr>
+        <p:spPr>
+          <a:xfrm>
+            <a:off x="777240" y="6263640"/>
+            <a:ext cx="10607040" cy="274320"/>
+          </a:xfrm>
+          <a:prstGeom prst="rect">
+            <a:avLst/>
+          </a:prstGeom>
+          <a:noFill/>
+        </p:spPr>
+        <p:txBody>
+          <a:bodyPr wrap="none">
+            <a:spAutoFit/>
+          </a:bodyPr>
+          <a:lstStyle/>
+          <a:p>
+            <a:pPr>
+              <a:defRPr sz="1000">
+                <a:solidFill>
+                  <a:srgbClr val="586376"/>
+                </a:solidFill>
+              </a:defRPr>
+            </a:pPr>
+            <a:r>
+              <a:t>Appointment Scheduling AI Agent | 24</a:t>
+            </a:r>
+          </a:p>
+        </p:txBody>
+      </p:sp>
+    </p:spTree>
+  </p:cSld>
+  <p:clrMapOvr>
+    <a:masterClrMapping/>
+  </p:clrMapOvr>
+</p:sld>
+</file>
+
+<file path=ppt/slides/slide25.xml><?xml version="1.0" encoding="utf-8"?>
+<p:sld xmlns:a="http://schemas.openxmlformats.org/drawingml/2006/main" xmlns:p="http://schemas.openxmlformats.org/presentationml/2006/main" xmlns:r="http://schemas.openxmlformats.org/officeDocument/2006/relationships">
+  <p:cSld>
+    <p:bg>
+      <p:bgPr>
+        <a:solidFill>
+          <a:srgbClr val="F7F8FB"/>
+        </a:solidFill>
+        <a:effectLst/>
+      </p:bgPr>
+    </p:bg>
+    <p:spTree>
+      <p:nvGrpSpPr>
+        <p:cNvPr id="1" name=""/>
+        <p:cNvGrpSpPr/>
+        <p:nvPr/>
+      </p:nvGrpSpPr>
+      <p:grpSpPr/>
+      <p:sp>
+        <p:nvSpPr>
+          <p:cNvPr id="2" name="Rectangle 1"/>
+          <p:cNvSpPr/>
+          <p:nvPr/>
+        </p:nvSpPr>
+        <p:spPr>
+          <a:xfrm>
+            <a:off x="0" y="0"/>
+            <a:ext cx="128016" cy="6858000"/>
+          </a:xfrm>
+          <a:prstGeom prst="rect">
+            <a:avLst/>
+          </a:prstGeom>
+          <a:solidFill>
+            <a:srgbClr val="0F766E"/>
+          </a:solidFill>
+          <a:ln>
+            <a:noFill/>
+          </a:ln>
+        </p:spPr>
+        <p:style>
+          <a:lnRef idx="1">
+            <a:schemeClr val="accent1"/>
+          </a:lnRef>
+          <a:fillRef idx="3">
+            <a:schemeClr val="accent1"/>
+          </a:fillRef>
+          <a:effectRef idx="2">
+            <a:schemeClr val="accent1"/>
+          </a:effectRef>
+          <a:fontRef idx="minor">
+            <a:schemeClr val="lt1"/>
+          </a:fontRef>
+        </p:style>
+        <p:txBody>
+          <a:bodyPr rtlCol="0" anchor="ctr"/>
+          <a:lstStyle/>
+          <a:p>
+            <a:pPr algn="ctr"/>
+          </a:p>
+        </p:txBody>
+      </p:sp>
+      <p:sp>
+        <p:nvSpPr>
+          <p:cNvPr id="3" name="TextBox 2"/>
+          <p:cNvSpPr txBox="1"/>
+          <p:nvPr/>
+        </p:nvSpPr>
+        <p:spPr>
+          <a:xfrm>
+            <a:off x="594360" y="411480"/>
+            <a:ext cx="10881360" cy="685800"/>
+          </a:xfrm>
+          <a:prstGeom prst="rect">
+            <a:avLst/>
+          </a:prstGeom>
+          <a:noFill/>
+        </p:spPr>
+        <p:txBody>
+          <a:bodyPr wrap="none">
+            <a:spAutoFit/>
+          </a:bodyPr>
+          <a:lstStyle/>
+          <a:p>
+            <a:pPr>
+              <a:defRPr sz="2700" b="1">
+                <a:solidFill>
+                  <a:srgbClr val="172033"/>
+                </a:solidFill>
+              </a:defRPr>
+            </a:pPr>
+            <a:r>
+              <a:t>What Interviewers Should Notice</a:t>
+            </a:r>
+          </a:p>
+        </p:txBody>
+      </p:sp>
+      <p:sp>
+        <p:nvSpPr>
+          <p:cNvPr id="4" name="TextBox 3"/>
+          <p:cNvSpPr txBox="1"/>
+          <p:nvPr/>
+        </p:nvSpPr>
+        <p:spPr>
+          <a:xfrm>
+            <a:off x="777240" y="1234440"/>
+            <a:ext cx="10607040" cy="4800600"/>
+          </a:xfrm>
+          <a:prstGeom prst="rect">
+            <a:avLst/>
+          </a:prstGeom>
+          <a:noFill/>
+        </p:spPr>
+        <p:txBody>
+          <a:bodyPr wrap="square">
+            <a:spAutoFit/>
+          </a:bodyPr>
+          <a:lstStyle/>
+          <a:p>
+            <a:pPr>
+              <a:spcAft>
+                <a:spcPts val="700"/>
+              </a:spcAft>
+              <a:defRPr sz="2100">
+                <a:solidFill>
+                  <a:srgbClr val="586376"/>
+                </a:solidFill>
+              </a:defRPr>
+            </a:pPr>
+            <a:r>
+              <a:t>Technical depth</a:t>
+            </a:r>
+          </a:p>
+          <a:p>
+            <a:pPr>
+              <a:spcAft>
+                <a:spcPts val="700"/>
+              </a:spcAft>
+              <a:defRPr sz="2100">
+                <a:solidFill>
+                  <a:srgbClr val="586376"/>
+                </a:solidFill>
+              </a:defRPr>
+            </a:pPr>
+            <a:r>
+              <a:t>Clear ownership</a:t>
+            </a:r>
+          </a:p>
+          <a:p>
+            <a:pPr>
+              <a:spcAft>
+                <a:spcPts val="700"/>
+              </a:spcAft>
+              <a:defRPr sz="2100">
+                <a:solidFill>
+                  <a:srgbClr val="586376"/>
+                </a:solidFill>
+              </a:defRPr>
+            </a:pPr>
+            <a:r>
+              <a:t>Product thinking</a:t>
+            </a:r>
+          </a:p>
+          <a:p>
+            <a:pPr>
+              <a:spcAft>
+                <a:spcPts val="700"/>
+              </a:spcAft>
+              <a:defRPr sz="2100">
+                <a:solidFill>
+                  <a:srgbClr val="586376"/>
+                </a:solidFill>
+              </a:defRPr>
+            </a:pPr>
+            <a:r>
+              <a:t>Safety-oriented design</a:t>
+            </a:r>
+          </a:p>
+          <a:p>
+            <a:pPr>
+              <a:spcAft>
+                <a:spcPts val="700"/>
+              </a:spcAft>
+              <a:defRPr sz="2100">
+                <a:solidFill>
+                  <a:srgbClr val="586376"/>
+                </a:solidFill>
+              </a:defRPr>
+            </a:pPr>
+            <a:r>
+              <a:t>Testability</a:t>
+            </a:r>
+          </a:p>
+          <a:p>
+            <a:pPr>
+              <a:spcAft>
+                <a:spcPts val="700"/>
+              </a:spcAft>
+              <a:defRPr sz="2100">
+                <a:solidFill>
+                  <a:srgbClr val="586376"/>
+                </a:solidFill>
+              </a:defRPr>
+            </a:pPr>
+            <a:r>
+              <a:t>Practical tradeoff decisions</a:t>
+            </a:r>
+          </a:p>
+          <a:p>
+            <a:pPr>
+              <a:spcAft>
+                <a:spcPts val="700"/>
+              </a:spcAft>
+              <a:defRPr sz="2100">
+                <a:solidFill>
+                  <a:srgbClr val="586376"/>
+                </a:solidFill>
+              </a:defRPr>
+            </a:pPr>
+            <a:r>
+              <a:t>Ability to explain the system end to end</a:t>
+            </a:r>
+          </a:p>
+        </p:txBody>
+      </p:sp>
+      <p:sp>
+        <p:nvSpPr>
+          <p:cNvPr id="5" name="TextBox 4"/>
+          <p:cNvSpPr txBox="1"/>
+          <p:nvPr/>
+        </p:nvSpPr>
+        <p:spPr>
+          <a:xfrm>
+            <a:off x="777240" y="6263640"/>
+            <a:ext cx="10607040" cy="274320"/>
+          </a:xfrm>
+          <a:prstGeom prst="rect">
+            <a:avLst/>
+          </a:prstGeom>
+          <a:noFill/>
+        </p:spPr>
+        <p:txBody>
+          <a:bodyPr wrap="none">
+            <a:spAutoFit/>
+          </a:bodyPr>
+          <a:lstStyle/>
+          <a:p>
+            <a:pPr>
+              <a:defRPr sz="1000">
+                <a:solidFill>
+                  <a:srgbClr val="586376"/>
+                </a:solidFill>
+              </a:defRPr>
+            </a:pPr>
+            <a:r>
+              <a:t>Appointment Scheduling AI Agent | 25</a:t>
             </a:r>
           </a:p>
         </p:txBody>
@@ -5102,8 +8122,8 @@
         </p:nvSpPr>
         <p:spPr>
           <a:xfrm>
-            <a:off x="594360" y="502920"/>
-            <a:ext cx="10789920" cy="731520"/>
+            <a:off x="594360" y="411480"/>
+            <a:ext cx="10881360" cy="685800"/>
           </a:xfrm>
           <a:prstGeom prst="rect">
             <a:avLst/>
@@ -5117,7 +8137,7 @@
           <a:lstStyle/>
           <a:p>
             <a:pPr>
-              <a:defRPr sz="3400" b="1">
+              <a:defRPr sz="3100" b="1">
                 <a:solidFill>
                   <a:srgbClr val="172033"/>
                 </a:solidFill>
@@ -5137,8 +8157,8 @@
         </p:nvSpPr>
         <p:spPr>
           <a:xfrm>
-            <a:off x="777240" y="1508760"/>
-            <a:ext cx="10607040" cy="4480560"/>
+            <a:off x="777240" y="1234440"/>
+            <a:ext cx="10607040" cy="4800600"/>
           </a:xfrm>
           <a:prstGeom prst="rect">
             <a:avLst/>
@@ -5146,17 +8166,32 @@
           <a:noFill/>
         </p:spPr>
         <p:txBody>
-          <a:bodyPr wrap="none">
+          <a:bodyPr wrap="square">
             <a:spAutoFit/>
           </a:bodyPr>
           <a:lstStyle/>
           <a:p>
             <a:pPr>
               <a:spcAft>
-                <a:spcPts val="1200"/>
+                <a:spcPts val="700"/>
               </a:spcAft>
               <a:defRPr sz="2200">
                 <a:solidFill>
+                  <a:srgbClr val="172033"/>
+                </a:solidFill>
+              </a:defRPr>
+            </a:pPr>
+            <a:r>
+              <a:t>Build a small custom agent:</a:t>
+            </a:r>
+          </a:p>
+          <a:p>
+            <a:pPr>
+              <a:spcAft>
+                <a:spcPts val="700"/>
+              </a:spcAft>
+              <a:defRPr sz="2100">
+                <a:solidFill>
                   <a:srgbClr val="586376"/>
                 </a:solidFill>
               </a:defRPr>
@@ -5168,9 +8203,9 @@
           <a:p>
             <a:pPr>
               <a:spcAft>
-                <a:spcPts val="1200"/>
-              </a:spcAft>
-              <a:defRPr sz="2200">
+                <a:spcPts val="700"/>
+              </a:spcAft>
+              <a:defRPr sz="2100">
                 <a:solidFill>
                   <a:srgbClr val="586376"/>
                 </a:solidFill>
@@ -5183,39 +8218,39 @@
           <a:p>
             <a:pPr>
               <a:spcAft>
-                <a:spcPts val="1200"/>
-              </a:spcAft>
-              <a:defRPr sz="2200">
-                <a:solidFill>
-                  <a:srgbClr val="586376"/>
-                </a:solidFill>
-              </a:defRPr>
-            </a:pPr>
-            <a:r>
-              <a:t>Pydantic for typed schemas</a:t>
-            </a:r>
-          </a:p>
-          <a:p>
-            <a:pPr>
-              <a:spcAft>
-                <a:spcPts val="1200"/>
-              </a:spcAft>
-              <a:defRPr sz="2200">
-                <a:solidFill>
-                  <a:srgbClr val="586376"/>
-                </a:solidFill>
-              </a:defRPr>
-            </a:pPr>
-            <a:r>
-              <a:t>Deterministic tools for appointment state changes</a:t>
-            </a:r>
-          </a:p>
-          <a:p>
-            <a:pPr>
-              <a:spcAft>
-                <a:spcPts val="1200"/>
-              </a:spcAft>
-              <a:defRPr sz="2200">
+                <a:spcPts val="700"/>
+              </a:spcAft>
+              <a:defRPr sz="2100">
+                <a:solidFill>
+                  <a:srgbClr val="586376"/>
+                </a:solidFill>
+              </a:defRPr>
+            </a:pPr>
+            <a:r>
+              <a:t>Pydantic for schemas and validation</a:t>
+            </a:r>
+          </a:p>
+          <a:p>
+            <a:pPr>
+              <a:spcAft>
+                <a:spcPts val="700"/>
+              </a:spcAft>
+              <a:defRPr sz="2100">
+                <a:solidFill>
+                  <a:srgbClr val="586376"/>
+                </a:solidFill>
+              </a:defRPr>
+            </a:pPr>
+            <a:r>
+              <a:t>Deterministic scheduling tools for state changes</a:t>
+            </a:r>
+          </a:p>
+          <a:p>
+            <a:pPr>
+              <a:spcAft>
+                <a:spcPts val="700"/>
+              </a:spcAft>
+              <a:defRPr sz="2100">
                 <a:solidFill>
                   <a:srgbClr val="586376"/>
                 </a:solidFill>
@@ -5339,8 +8374,8 @@
         </p:nvSpPr>
         <p:spPr>
           <a:xfrm>
-            <a:off x="594360" y="502920"/>
-            <a:ext cx="10789920" cy="731520"/>
+            <a:off x="594360" y="411480"/>
+            <a:ext cx="10881360" cy="685800"/>
           </a:xfrm>
           <a:prstGeom prst="rect">
             <a:avLst/>
@@ -5354,7 +8389,7 @@
           <a:lstStyle/>
           <a:p>
             <a:pPr>
-              <a:defRPr sz="3400" b="1">
+              <a:defRPr sz="3100" b="1">
                 <a:solidFill>
                   <a:srgbClr val="172033"/>
                 </a:solidFill>
@@ -5374,8 +8409,8 @@
         </p:nvSpPr>
         <p:spPr>
           <a:xfrm>
-            <a:off x="777240" y="1508760"/>
-            <a:ext cx="10607040" cy="4480560"/>
+            <a:off x="777240" y="1234440"/>
+            <a:ext cx="10607040" cy="4800600"/>
           </a:xfrm>
           <a:prstGeom prst="rect">
             <a:avLst/>
@@ -5383,18 +8418,18 @@
           <a:noFill/>
         </p:spPr>
         <p:txBody>
-          <a:bodyPr wrap="none">
+          <a:bodyPr wrap="square">
             <a:spAutoFit/>
           </a:bodyPr>
           <a:lstStyle/>
           <a:p>
             <a:pPr>
               <a:spcAft>
-                <a:spcPts val="1200"/>
+                <a:spcPts val="700"/>
               </a:spcAft>
               <a:defRPr sz="2200">
                 <a:solidFill>
-                  <a:srgbClr val="586376"/>
+                  <a:srgbClr val="172033"/>
                 </a:solidFill>
               </a:defRPr>
             </a:pPr>
@@ -5405,31 +8440,16 @@
           <a:p>
             <a:pPr>
               <a:spcAft>
-                <a:spcPts val="1200"/>
+                <a:spcPts val="700"/>
               </a:spcAft>
               <a:defRPr sz="2200">
                 <a:solidFill>
-                  <a:srgbClr val="586376"/>
-                </a:solidFill>
-              </a:defRPr>
-            </a:pPr>
-            <a:r>
-              <a:t>The model asks questions and requests tools.</a:t>
-            </a:r>
-          </a:p>
-          <a:p>
-            <a:pPr>
-              <a:spcAft>
-                <a:spcPts val="1200"/>
-              </a:spcAft>
-              <a:defRPr sz="1900">
-                <a:solidFill>
-                  <a:srgbClr val="586376"/>
-                </a:solidFill>
-              </a:defRPr>
-            </a:pPr>
-            <a:r>
-              <a:t>Typed tools validate inputs and perform booking, cancellation, and rescheduling.</a:t>
+                  <a:srgbClr val="172033"/>
+                </a:solidFill>
+              </a:defRPr>
+            </a:pPr>
+            <a:r>
+              <a:t>The model can ask questions, reason, and request tools. It cannot directly book, cancel, or reschedule.</a:t>
             </a:r>
           </a:p>
         </p:txBody>
@@ -5546,8 +8566,8 @@
         </p:nvSpPr>
         <p:spPr>
           <a:xfrm>
-            <a:off x="594360" y="502920"/>
-            <a:ext cx="10789920" cy="731520"/>
+            <a:off x="594360" y="411480"/>
+            <a:ext cx="10881360" cy="685800"/>
           </a:xfrm>
           <a:prstGeom prst="rect">
             <a:avLst/>
@@ -5561,14 +8581,14 @@
           <a:lstStyle/>
           <a:p>
             <a:pPr>
-              <a:defRPr sz="3400" b="1">
+              <a:defRPr sz="3100" b="1">
                 <a:solidFill>
                   <a:srgbClr val="172033"/>
                 </a:solidFill>
               </a:defRPr>
             </a:pPr>
             <a:r>
-              <a:t>Architecture</a:t>
+              <a:t>Current Architecture</a:t>
             </a:r>
           </a:p>
         </p:txBody>
@@ -5581,8 +8601,8 @@
         </p:nvSpPr>
         <p:spPr>
           <a:xfrm>
-            <a:off x="777240" y="1508760"/>
-            <a:ext cx="10607040" cy="4480560"/>
+            <a:off x="777240" y="1234440"/>
+            <a:ext cx="10607040" cy="4800600"/>
           </a:xfrm>
           <a:prstGeom prst="rect">
             <a:avLst/>
@@ -5590,19 +8610,20 @@
           <a:noFill/>
         </p:spPr>
         <p:txBody>
-          <a:bodyPr wrap="none">
+          <a:bodyPr wrap="square">
             <a:spAutoFit/>
           </a:bodyPr>
           <a:lstStyle/>
           <a:p>
             <a:pPr>
               <a:spcAft>
-                <a:spcPts val="1200"/>
-              </a:spcAft>
-              <a:defRPr sz="2200">
-                <a:solidFill>
-                  <a:srgbClr val="586376"/>
-                </a:solidFill>
+                <a:spcPts val="700"/>
+              </a:spcAft>
+              <a:defRPr sz="1500">
+                <a:solidFill>
+                  <a:srgbClr val="172033"/>
+                </a:solidFill>
+                <a:latin typeface="Courier New"/>
               </a:defRPr>
             </a:pPr>
             <a:r>
@@ -5612,106 +8633,145 @@
           <a:p>
             <a:pPr>
               <a:spcAft>
-                <a:spcPts val="1200"/>
-              </a:spcAft>
-              <a:defRPr sz="2200">
-                <a:solidFill>
-                  <a:srgbClr val="586376"/>
-                </a:solidFill>
-              </a:defRPr>
-            </a:pPr>
-            <a:r>
-              <a:t>Browser UI</a:t>
-            </a:r>
-          </a:p>
-          <a:p>
-            <a:pPr>
-              <a:spcAft>
-                <a:spcPts val="1200"/>
-              </a:spcAft>
-              <a:defRPr sz="2200">
-                <a:solidFill>
-                  <a:srgbClr val="586376"/>
-                </a:solidFill>
-              </a:defRPr>
-            </a:pPr>
-            <a:r>
-              <a:t>OpenAI STT if voice</a:t>
-            </a:r>
-          </a:p>
-          <a:p>
-            <a:pPr>
-              <a:spcAft>
-                <a:spcPts val="1200"/>
-              </a:spcAft>
-              <a:defRPr sz="2200">
-                <a:solidFill>
-                  <a:srgbClr val="586376"/>
-                </a:solidFill>
-              </a:defRPr>
-            </a:pPr>
-            <a:r>
-              <a:t>Conversation orchestrator</a:t>
-            </a:r>
-          </a:p>
-          <a:p>
-            <a:pPr>
-              <a:spcAft>
-                <a:spcPts val="1200"/>
-              </a:spcAft>
-              <a:defRPr sz="2200">
-                <a:solidFill>
-                  <a:srgbClr val="586376"/>
-                </a:solidFill>
-              </a:defRPr>
-            </a:pPr>
-            <a:r>
-              <a:t>GPT-5.5 tool calling</a:t>
-            </a:r>
-          </a:p>
-          <a:p>
-            <a:pPr>
-              <a:spcAft>
-                <a:spcPts val="1200"/>
-              </a:spcAft>
-              <a:defRPr sz="2200">
-                <a:solidFill>
-                  <a:srgbClr val="586376"/>
-                </a:solidFill>
-              </a:defRPr>
-            </a:pPr>
-            <a:r>
-              <a:t>Scheduling tools and store</a:t>
-            </a:r>
-          </a:p>
-          <a:p>
-            <a:pPr>
-              <a:spcAft>
-                <a:spcPts val="1200"/>
-              </a:spcAft>
-              <a:defRPr sz="2200">
-                <a:solidFill>
-                  <a:srgbClr val="586376"/>
-                </a:solidFill>
-              </a:defRPr>
-            </a:pPr>
-            <a:r>
-              <a:t>Sanitized response</a:t>
-            </a:r>
-          </a:p>
-          <a:p>
-            <a:pPr>
-              <a:spcAft>
-                <a:spcPts val="1200"/>
-              </a:spcAft>
-              <a:defRPr sz="2200">
-                <a:solidFill>
-                  <a:srgbClr val="586376"/>
-                </a:solidFill>
-              </a:defRPr>
-            </a:pPr>
-            <a:r>
-              <a:t>Streaming UI and OpenAI TTS</a:t>
+                <a:spcPts val="700"/>
+              </a:spcAft>
+              <a:defRPr sz="1500">
+                <a:solidFill>
+                  <a:srgbClr val="172033"/>
+                </a:solidFill>
+                <a:latin typeface="Courier New"/>
+              </a:defRPr>
+            </a:pPr>
+            <a:r>
+              <a:t>-&gt; Browser UI</a:t>
+            </a:r>
+          </a:p>
+          <a:p>
+            <a:pPr>
+              <a:spcAft>
+                <a:spcPts val="700"/>
+              </a:spcAft>
+              <a:defRPr sz="1500">
+                <a:solidFill>
+                  <a:srgbClr val="172033"/>
+                </a:solidFill>
+                <a:latin typeface="Courier New"/>
+              </a:defRPr>
+            </a:pPr>
+            <a:r>
+              <a:t>-&gt; OpenAI STT if voice</a:t>
+            </a:r>
+          </a:p>
+          <a:p>
+            <a:pPr>
+              <a:spcAft>
+                <a:spcPts val="700"/>
+              </a:spcAft>
+              <a:defRPr sz="1500">
+                <a:solidFill>
+                  <a:srgbClr val="172033"/>
+                </a:solidFill>
+                <a:latin typeface="Courier New"/>
+              </a:defRPr>
+            </a:pPr>
+            <a:r>
+              <a:t>-&gt; Orchestrator</a:t>
+            </a:r>
+          </a:p>
+          <a:p>
+            <a:pPr>
+              <a:spcAft>
+                <a:spcPts val="700"/>
+              </a:spcAft>
+              <a:defRPr sz="1500">
+                <a:solidFill>
+                  <a:srgbClr val="172033"/>
+                </a:solidFill>
+                <a:latin typeface="Courier New"/>
+              </a:defRPr>
+            </a:pPr>
+            <a:r>
+              <a:t>-&gt; GPT-5.5 tool calling</a:t>
+            </a:r>
+          </a:p>
+          <a:p>
+            <a:pPr>
+              <a:spcAft>
+                <a:spcPts val="700"/>
+              </a:spcAft>
+              <a:defRPr sz="1500">
+                <a:solidFill>
+                  <a:srgbClr val="172033"/>
+                </a:solidFill>
+                <a:latin typeface="Courier New"/>
+              </a:defRPr>
+            </a:pPr>
+            <a:r>
+              <a:t>-&gt; Scheduling tools</a:t>
+            </a:r>
+          </a:p>
+          <a:p>
+            <a:pPr>
+              <a:spcAft>
+                <a:spcPts val="700"/>
+              </a:spcAft>
+              <a:defRPr sz="1500">
+                <a:solidFill>
+                  <a:srgbClr val="172033"/>
+                </a:solidFill>
+                <a:latin typeface="Courier New"/>
+              </a:defRPr>
+            </a:pPr>
+            <a:r>
+              <a:t>-&gt; Store</a:t>
+            </a:r>
+          </a:p>
+          <a:p>
+            <a:pPr>
+              <a:spcAft>
+                <a:spcPts val="700"/>
+              </a:spcAft>
+              <a:defRPr sz="1500">
+                <a:solidFill>
+                  <a:srgbClr val="172033"/>
+                </a:solidFill>
+                <a:latin typeface="Courier New"/>
+              </a:defRPr>
+            </a:pPr>
+            <a:r>
+              <a:t>-&gt; Sanitized response</a:t>
+            </a:r>
+          </a:p>
+          <a:p>
+            <a:pPr>
+              <a:spcAft>
+                <a:spcPts val="700"/>
+              </a:spcAft>
+              <a:defRPr sz="1500">
+                <a:solidFill>
+                  <a:srgbClr val="172033"/>
+                </a:solidFill>
+                <a:latin typeface="Courier New"/>
+              </a:defRPr>
+            </a:pPr>
+            <a:r>
+              <a:t>-&gt; Streaming UI</a:t>
+            </a:r>
+          </a:p>
+          <a:p>
+            <a:pPr>
+              <a:spcAft>
+                <a:spcPts val="700"/>
+              </a:spcAft>
+              <a:defRPr sz="1500">
+                <a:solidFill>
+                  <a:srgbClr val="172033"/>
+                </a:solidFill>
+                <a:latin typeface="Courier New"/>
+              </a:defRPr>
+            </a:pPr>
+            <a:r>
+              <a:t>-&gt; OpenAI TTS</a:t>
             </a:r>
           </a:p>
         </p:txBody>
@@ -5828,8 +8888,8 @@
         </p:nvSpPr>
         <p:spPr>
           <a:xfrm>
-            <a:off x="594360" y="502920"/>
-            <a:ext cx="10789920" cy="731520"/>
+            <a:off x="594360" y="411480"/>
+            <a:ext cx="10881360" cy="685800"/>
           </a:xfrm>
           <a:prstGeom prst="rect">
             <a:avLst/>
@@ -5843,14 +8903,14 @@
           <a:lstStyle/>
           <a:p>
             <a:pPr>
-              <a:defRPr sz="3400" b="1">
+              <a:defRPr sz="3100" b="1">
                 <a:solidFill>
                   <a:srgbClr val="172033"/>
                 </a:solidFill>
               </a:defRPr>
             </a:pPr>
             <a:r>
-              <a:t>Safety</a:t>
+              <a:t>Full Agent Process</a:t>
             </a:r>
           </a:p>
         </p:txBody>
@@ -5863,8 +8923,8 @@
         </p:nvSpPr>
         <p:spPr>
           <a:xfrm>
-            <a:off x="777240" y="1508760"/>
-            <a:ext cx="10607040" cy="4480560"/>
+            <a:off x="777240" y="1234440"/>
+            <a:ext cx="10607040" cy="4800600"/>
           </a:xfrm>
           <a:prstGeom prst="rect">
             <a:avLst/>
@@ -5872,98 +8932,158 @@
           <a:noFill/>
         </p:spPr>
         <p:txBody>
-          <a:bodyPr wrap="none">
+          <a:bodyPr wrap="square">
             <a:spAutoFit/>
           </a:bodyPr>
           <a:lstStyle/>
           <a:p>
             <a:pPr>
               <a:spcAft>
-                <a:spcPts val="1200"/>
-              </a:spcAft>
-              <a:defRPr sz="2200">
-                <a:solidFill>
-                  <a:srgbClr val="586376"/>
-                </a:solidFill>
-              </a:defRPr>
-            </a:pPr>
-            <a:r>
-              <a:t>Explicit confirmation before booking</a:t>
-            </a:r>
-          </a:p>
-          <a:p>
-            <a:pPr>
-              <a:spcAft>
-                <a:spcPts val="1200"/>
-              </a:spcAft>
-              <a:defRPr sz="2200">
-                <a:solidFill>
-                  <a:srgbClr val="586376"/>
-                </a:solidFill>
-              </a:defRPr>
-            </a:pPr>
-            <a:r>
-              <a:t>Explicit confirmation before cancellation</a:t>
-            </a:r>
-          </a:p>
-          <a:p>
-            <a:pPr>
-              <a:spcAft>
-                <a:spcPts val="1200"/>
-              </a:spcAft>
-              <a:defRPr sz="2200">
-                <a:solidFill>
-                  <a:srgbClr val="586376"/>
-                </a:solidFill>
-              </a:defRPr>
-            </a:pPr>
-            <a:r>
-              <a:t>Explicit confirmation before rescheduling</a:t>
-            </a:r>
-          </a:p>
-          <a:p>
-            <a:pPr>
-              <a:spcAft>
-                <a:spcPts val="1200"/>
-              </a:spcAft>
-              <a:defRPr sz="2200">
-                <a:solidFill>
-                  <a:srgbClr val="586376"/>
-                </a:solidFill>
-              </a:defRPr>
-            </a:pPr>
-            <a:r>
-              <a:t>Emergency handling before model calls</a:t>
-            </a:r>
-          </a:p>
-          <a:p>
-            <a:pPr>
-              <a:spcAft>
-                <a:spcPts val="1200"/>
-              </a:spcAft>
-              <a:defRPr sz="2200">
-                <a:solidFill>
-                  <a:srgbClr val="586376"/>
-                </a:solidFill>
-              </a:defRPr>
-            </a:pPr>
-            <a:r>
-              <a:t>No medical advice</a:t>
-            </a:r>
-          </a:p>
-          <a:p>
-            <a:pPr>
-              <a:spcAft>
-                <a:spcPts val="1200"/>
-              </a:spcAft>
-              <a:defRPr sz="2200">
-                <a:solidFill>
-                  <a:srgbClr val="586376"/>
-                </a:solidFill>
-              </a:defRPr>
-            </a:pPr>
-            <a:r>
-              <a:t>English-only STT and responses</a:t>
+                <a:spcPts val="700"/>
+              </a:spcAft>
+              <a:defRPr sz="1700">
+                <a:solidFill>
+                  <a:srgbClr val="172033"/>
+                </a:solidFill>
+              </a:defRPr>
+            </a:pPr>
+            <a:r>
+              <a:t>1. Receive text or audio input</a:t>
+            </a:r>
+          </a:p>
+          <a:p>
+            <a:pPr>
+              <a:spcAft>
+                <a:spcPts val="700"/>
+              </a:spcAft>
+              <a:defRPr sz="1700">
+                <a:solidFill>
+                  <a:srgbClr val="172033"/>
+                </a:solidFill>
+              </a:defRPr>
+            </a:pPr>
+            <a:r>
+              <a:t>2. Transcribe audio to English if needed</a:t>
+            </a:r>
+          </a:p>
+          <a:p>
+            <a:pPr>
+              <a:spcAft>
+                <a:spcPts val="700"/>
+              </a:spcAft>
+              <a:defRPr sz="1700">
+                <a:solidFill>
+                  <a:srgbClr val="172033"/>
+                </a:solidFill>
+              </a:defRPr>
+            </a:pPr>
+            <a:r>
+              <a:t>3. Check emergency rules before the LLM</a:t>
+            </a:r>
+          </a:p>
+          <a:p>
+            <a:pPr>
+              <a:spcAft>
+                <a:spcPts val="700"/>
+              </a:spcAft>
+              <a:defRPr sz="1700">
+                <a:solidFill>
+                  <a:srgbClr val="172033"/>
+                </a:solidFill>
+              </a:defRPr>
+            </a:pPr>
+            <a:r>
+              <a:t>4. Load session state and conversation history</a:t>
+            </a:r>
+          </a:p>
+          <a:p>
+            <a:pPr>
+              <a:spcAft>
+                <a:spcPts val="700"/>
+              </a:spcAft>
+              <a:defRPr sz="1700">
+                <a:solidFill>
+                  <a:srgbClr val="172033"/>
+                </a:solidFill>
+              </a:defRPr>
+            </a:pPr>
+            <a:r>
+              <a:t>5. Call the LLM with tool schemas</a:t>
+            </a:r>
+          </a:p>
+          <a:p>
+            <a:pPr>
+              <a:spcAft>
+                <a:spcPts val="700"/>
+              </a:spcAft>
+              <a:defRPr sz="1700">
+                <a:solidFill>
+                  <a:srgbClr val="172033"/>
+                </a:solidFill>
+              </a:defRPr>
+            </a:pPr>
+            <a:r>
+              <a:t>6. Validate and execute requested tool calls</a:t>
+            </a:r>
+          </a:p>
+          <a:p>
+            <a:pPr>
+              <a:spcAft>
+                <a:spcPts val="700"/>
+              </a:spcAft>
+              <a:defRPr sz="1700">
+                <a:solidFill>
+                  <a:srgbClr val="172033"/>
+                </a:solidFill>
+              </a:defRPr>
+            </a:pPr>
+            <a:r>
+              <a:t>7. Update appointment state only inside tools</a:t>
+            </a:r>
+          </a:p>
+          <a:p>
+            <a:pPr>
+              <a:spcAft>
+                <a:spcPts val="700"/>
+              </a:spcAft>
+              <a:defRPr sz="1700">
+                <a:solidFill>
+                  <a:srgbClr val="172033"/>
+                </a:solidFill>
+              </a:defRPr>
+            </a:pPr>
+            <a:r>
+              <a:t>8. Sanitize response for TTS</a:t>
+            </a:r>
+          </a:p>
+          <a:p>
+            <a:pPr>
+              <a:spcAft>
+                <a:spcPts val="700"/>
+              </a:spcAft>
+              <a:defRPr sz="1700">
+                <a:solidFill>
+                  <a:srgbClr val="172033"/>
+                </a:solidFill>
+              </a:defRPr>
+            </a:pPr>
+            <a:r>
+              <a:t>9. Log user, assistant, and tool events</a:t>
+            </a:r>
+          </a:p>
+          <a:p>
+            <a:pPr>
+              <a:spcAft>
+                <a:spcPts val="700"/>
+              </a:spcAft>
+              <a:defRPr sz="1700">
+                <a:solidFill>
+                  <a:srgbClr val="586376"/>
+                </a:solidFill>
+              </a:defRPr>
+            </a:pPr>
+            <a:r>
+              <a:t>10. Stream response to UI and optionally play TTS</a:t>
             </a:r>
           </a:p>
         </p:txBody>
@@ -6080,8 +9200,8 @@
         </p:nvSpPr>
         <p:spPr>
           <a:xfrm>
-            <a:off x="594360" y="502920"/>
-            <a:ext cx="10789920" cy="731520"/>
+            <a:off x="594360" y="411480"/>
+            <a:ext cx="10881360" cy="685800"/>
           </a:xfrm>
           <a:prstGeom prst="rect">
             <a:avLst/>
@@ -6095,14 +9215,14 @@
           <a:lstStyle/>
           <a:p>
             <a:pPr>
-              <a:defRPr sz="3400" b="1">
+              <a:defRPr sz="3100" b="1">
                 <a:solidFill>
                   <a:srgbClr val="172033"/>
                 </a:solidFill>
               </a:defRPr>
             </a:pPr>
             <a:r>
-              <a:t>Voice Experience</a:t>
+              <a:t>Agent Best Practices</a:t>
             </a:r>
           </a:p>
         </p:txBody>
@@ -6115,8 +9235,8 @@
         </p:nvSpPr>
         <p:spPr>
           <a:xfrm>
-            <a:off x="777240" y="1508760"/>
-            <a:ext cx="10607040" cy="4480560"/>
+            <a:off x="777240" y="1234440"/>
+            <a:ext cx="10607040" cy="4800600"/>
           </a:xfrm>
           <a:prstGeom prst="rect">
             <a:avLst/>
@@ -6124,98 +9244,113 @@
           <a:noFill/>
         </p:spPr>
         <p:txBody>
-          <a:bodyPr wrap="none">
+          <a:bodyPr wrap="square">
             <a:spAutoFit/>
           </a:bodyPr>
           <a:lstStyle/>
           <a:p>
             <a:pPr>
               <a:spcAft>
-                <a:spcPts val="1200"/>
-              </a:spcAft>
-              <a:defRPr sz="2200">
-                <a:solidFill>
-                  <a:srgbClr val="586376"/>
-                </a:solidFill>
-              </a:defRPr>
-            </a:pPr>
-            <a:r>
-              <a:t>Hold-to-talk microphone input</a:t>
-            </a:r>
-          </a:p>
-          <a:p>
-            <a:pPr>
-              <a:spcAft>
-                <a:spcPts val="1200"/>
-              </a:spcAft>
-              <a:defRPr sz="2200">
-                <a:solidFill>
-                  <a:srgbClr val="586376"/>
-                </a:solidFill>
-              </a:defRPr>
-            </a:pPr>
-            <a:r>
-              <a:t>Audio sent to OpenAI transcription</a:t>
-            </a:r>
-          </a:p>
-          <a:p>
-            <a:pPr>
-              <a:spcAft>
-                <a:spcPts val="1200"/>
-              </a:spcAft>
-              <a:defRPr sz="2200">
-                <a:solidFill>
-                  <a:srgbClr val="586376"/>
-                </a:solidFill>
-              </a:defRPr>
-            </a:pPr>
-            <a:r>
-              <a:t>Assistant response shown in chat</a:t>
-            </a:r>
-          </a:p>
-          <a:p>
-            <a:pPr>
-              <a:spcAft>
-                <a:spcPts val="1200"/>
-              </a:spcAft>
-              <a:defRPr sz="2200">
-                <a:solidFill>
-                  <a:srgbClr val="586376"/>
-                </a:solidFill>
-              </a:defRPr>
-            </a:pPr>
-            <a:r>
-              <a:t>OpenAI speech output</a:t>
-            </a:r>
-          </a:p>
-          <a:p>
-            <a:pPr>
-              <a:spcAft>
-                <a:spcPts val="1200"/>
-              </a:spcAft>
-              <a:defRPr sz="2200">
-                <a:solidFill>
-                  <a:srgbClr val="586376"/>
-                </a:solidFill>
-              </a:defRPr>
-            </a:pPr>
-            <a:r>
-              <a:t>Interrupt button stops playback</a:t>
-            </a:r>
-          </a:p>
-          <a:p>
-            <a:pPr>
-              <a:spcAft>
-                <a:spcPts val="1200"/>
-              </a:spcAft>
-              <a:defRPr sz="2200">
-                <a:solidFill>
-                  <a:srgbClr val="586376"/>
-                </a:solidFill>
-              </a:defRPr>
-            </a:pPr>
-            <a:r>
-              <a:t>Voice upload retries once after transient fetch failure</a:t>
+                <a:spcPts val="700"/>
+              </a:spcAft>
+              <a:defRPr sz="2100">
+                <a:solidFill>
+                  <a:srgbClr val="586376"/>
+                </a:solidFill>
+              </a:defRPr>
+            </a:pPr>
+            <a:r>
+              <a:t>Keep deterministic business logic outside the LLM</a:t>
+            </a:r>
+          </a:p>
+          <a:p>
+            <a:pPr>
+              <a:spcAft>
+                <a:spcPts val="700"/>
+              </a:spcAft>
+              <a:defRPr sz="2100">
+                <a:solidFill>
+                  <a:srgbClr val="586376"/>
+                </a:solidFill>
+              </a:defRPr>
+            </a:pPr>
+            <a:r>
+              <a:t>Use typed schemas for all tool inputs and outputs</a:t>
+            </a:r>
+          </a:p>
+          <a:p>
+            <a:pPr>
+              <a:spcAft>
+                <a:spcPts val="700"/>
+              </a:spcAft>
+              <a:defRPr sz="2100">
+                <a:solidFill>
+                  <a:srgbClr val="586376"/>
+                </a:solidFill>
+              </a:defRPr>
+            </a:pPr>
+            <a:r>
+              <a:t>Require explicit confirmation for state-changing actions</a:t>
+            </a:r>
+          </a:p>
+          <a:p>
+            <a:pPr>
+              <a:spcAft>
+                <a:spcPts val="700"/>
+              </a:spcAft>
+              <a:defRPr sz="2100">
+                <a:solidFill>
+                  <a:srgbClr val="586376"/>
+                </a:solidFill>
+              </a:defRPr>
+            </a:pPr>
+            <a:r>
+              <a:t>Keep prompts short, specific, and testable</a:t>
+            </a:r>
+          </a:p>
+          <a:p>
+            <a:pPr>
+              <a:spcAft>
+                <a:spcPts val="700"/>
+              </a:spcAft>
+              <a:defRPr sz="2100">
+                <a:solidFill>
+                  <a:srgbClr val="586376"/>
+                </a:solidFill>
+              </a:defRPr>
+            </a:pPr>
+            <a:r>
+              <a:t>Add rule-based safety gates before model calls</a:t>
+            </a:r>
+          </a:p>
+          <a:p>
+            <a:pPr>
+              <a:spcAft>
+                <a:spcPts val="700"/>
+              </a:spcAft>
+              <a:defRPr sz="2100">
+                <a:solidFill>
+                  <a:srgbClr val="586376"/>
+                </a:solidFill>
+              </a:defRPr>
+            </a:pPr>
+            <a:r>
+              <a:t>Keep tool traces readable for debugging</a:t>
+            </a:r>
+          </a:p>
+          <a:p>
+            <a:pPr>
+              <a:spcAft>
+                <a:spcPts val="700"/>
+              </a:spcAft>
+              <a:defRPr sz="2100">
+                <a:solidFill>
+                  <a:srgbClr val="586376"/>
+                </a:solidFill>
+              </a:defRPr>
+            </a:pPr>
+            <a:r>
+              <a:t>Log session events for audit and evaluation</a:t>
             </a:r>
           </a:p>
         </p:txBody>
@@ -6332,8 +9467,8 @@
         </p:nvSpPr>
         <p:spPr>
           <a:xfrm>
-            <a:off x="594360" y="502920"/>
-            <a:ext cx="10789920" cy="731520"/>
+            <a:off x="594360" y="411480"/>
+            <a:ext cx="10881360" cy="685800"/>
           </a:xfrm>
           <a:prstGeom prst="rect">
             <a:avLst/>
@@ -6347,7 +9482,7 @@
           <a:lstStyle/>
           <a:p>
             <a:pPr>
-              <a:defRPr sz="3400" b="1">
+              <a:defRPr sz="3100" b="1">
                 <a:solidFill>
                   <a:srgbClr val="172033"/>
                 </a:solidFill>
@@ -6367,8 +9502,8 @@
         </p:nvSpPr>
         <p:spPr>
           <a:xfrm>
-            <a:off x="777240" y="1508760"/>
-            <a:ext cx="10607040" cy="4480560"/>
+            <a:off x="777240" y="1234440"/>
+            <a:ext cx="10607040" cy="4800600"/>
           </a:xfrm>
           <a:prstGeom prst="rect">
             <a:avLst/>
@@ -6376,16 +9511,31 @@
           <a:noFill/>
         </p:spPr>
         <p:txBody>
-          <a:bodyPr wrap="none">
+          <a:bodyPr wrap="square">
             <a:spAutoFit/>
           </a:bodyPr>
           <a:lstStyle/>
           <a:p>
             <a:pPr>
               <a:spcAft>
-                <a:spcPts val="1200"/>
-              </a:spcAft>
-              <a:defRPr sz="2200">
+                <a:spcPts val="700"/>
+              </a:spcAft>
+              <a:defRPr sz="1700">
+                <a:solidFill>
+                  <a:srgbClr val="172033"/>
+                </a:solidFill>
+              </a:defRPr>
+            </a:pPr>
+            <a:r>
+              <a:t>Per-session state tracks:</a:t>
+            </a:r>
+          </a:p>
+          <a:p>
+            <a:pPr>
+              <a:spcAft>
+                <a:spcPts val="700"/>
+              </a:spcAft>
+              <a:defRPr sz="1700">
                 <a:solidFill>
                   <a:srgbClr val="586376"/>
                 </a:solidFill>
@@ -6398,9 +9548,9 @@
           <a:p>
             <a:pPr>
               <a:spcAft>
-                <a:spcPts val="1200"/>
-              </a:spcAft>
-              <a:defRPr sz="2200">
+                <a:spcPts val="700"/>
+              </a:spcAft>
+              <a:defRPr sz="1700">
                 <a:solidFill>
                   <a:srgbClr val="586376"/>
                 </a:solidFill>
@@ -6413,9 +9563,9 @@
           <a:p>
             <a:pPr>
               <a:spcAft>
-                <a:spcPts val="1200"/>
-              </a:spcAft>
-              <a:defRPr sz="2200">
+                <a:spcPts val="700"/>
+              </a:spcAft>
+              <a:defRPr sz="1700">
                 <a:solidFill>
                   <a:srgbClr val="586376"/>
                 </a:solidFill>
@@ -6428,9 +9578,9 @@
           <a:p>
             <a:pPr>
               <a:spcAft>
-                <a:spcPts val="1200"/>
-              </a:spcAft>
-              <a:defRPr sz="2200">
+                <a:spcPts val="700"/>
+              </a:spcAft>
+              <a:defRPr sz="1700">
                 <a:solidFill>
                   <a:srgbClr val="586376"/>
                 </a:solidFill>
@@ -6443,9 +9593,9 @@
           <a:p>
             <a:pPr>
               <a:spcAft>
-                <a:spcPts val="1200"/>
-              </a:spcAft>
-              <a:defRPr sz="2200">
+                <a:spcPts val="700"/>
+              </a:spcAft>
+              <a:defRPr sz="1700">
                 <a:solidFill>
                   <a:srgbClr val="586376"/>
                 </a:solidFill>
@@ -6458,9 +9608,9 @@
           <a:p>
             <a:pPr>
               <a:spcAft>
-                <a:spcPts val="1200"/>
-              </a:spcAft>
-              <a:defRPr sz="2200">
+                <a:spcPts val="700"/>
+              </a:spcAft>
+              <a:defRPr sz="1700">
                 <a:solidFill>
                   <a:srgbClr val="586376"/>
                 </a:solidFill>
@@ -6473,9 +9623,9 @@
           <a:p>
             <a:pPr>
               <a:spcAft>
-                <a:spcPts val="1200"/>
-              </a:spcAft>
-              <a:defRPr sz="2200">
+                <a:spcPts val="700"/>
+              </a:spcAft>
+              <a:defRPr sz="1700">
                 <a:solidFill>
                   <a:srgbClr val="586376"/>
                 </a:solidFill>
@@ -6483,6 +9633,21 @@
             </a:pPr>
             <a:r>
               <a:t>Emergency status</a:t>
+            </a:r>
+          </a:p>
+          <a:p>
+            <a:pPr>
+              <a:spcAft>
+                <a:spcPts val="700"/>
+              </a:spcAft>
+              <a:defRPr sz="1700">
+                <a:solidFill>
+                  <a:srgbClr val="172033"/>
+                </a:solidFill>
+              </a:defRPr>
+            </a:pPr>
+            <a:r>
+              <a:t>Production storage should move from process memory to Redis or a database.</a:t>
             </a:r>
           </a:p>
         </p:txBody>
@@ -6599,8 +9764,8 @@
         </p:nvSpPr>
         <p:spPr>
           <a:xfrm>
-            <a:off x="594360" y="502920"/>
-            <a:ext cx="10789920" cy="731520"/>
+            <a:off x="594360" y="411480"/>
+            <a:ext cx="10881360" cy="685800"/>
           </a:xfrm>
           <a:prstGeom prst="rect">
             <a:avLst/>
@@ -6614,14 +9779,14 @@
           <a:lstStyle/>
           <a:p>
             <a:pPr>
-              <a:defRPr sz="3400" b="1">
+              <a:defRPr sz="3100" b="1">
                 <a:solidFill>
                   <a:srgbClr val="172033"/>
                 </a:solidFill>
               </a:defRPr>
             </a:pPr>
             <a:r>
-              <a:t>Logging And Debugging</a:t>
+              <a:t>Scheduling Safety</a:t>
             </a:r>
           </a:p>
         </p:txBody>
@@ -6634,8 +9799,8 @@
         </p:nvSpPr>
         <p:spPr>
           <a:xfrm>
-            <a:off x="777240" y="1508760"/>
-            <a:ext cx="10607040" cy="4480560"/>
+            <a:off x="777240" y="1234440"/>
+            <a:ext cx="10607040" cy="4800600"/>
           </a:xfrm>
           <a:prstGeom prst="rect">
             <a:avLst/>
@@ -6643,68 +9808,98 @@
           <a:noFill/>
         </p:spPr>
         <p:txBody>
-          <a:bodyPr wrap="none">
+          <a:bodyPr wrap="square">
             <a:spAutoFit/>
           </a:bodyPr>
           <a:lstStyle/>
           <a:p>
             <a:pPr>
               <a:spcAft>
-                <a:spcPts val="1200"/>
-              </a:spcAft>
-              <a:defRPr sz="2200">
-                <a:solidFill>
-                  <a:srgbClr val="586376"/>
-                </a:solidFill>
-              </a:defRPr>
-            </a:pPr>
-            <a:r>
-              <a:t>Session events written as JSONL</a:t>
-            </a:r>
-          </a:p>
-          <a:p>
-            <a:pPr>
-              <a:spcAft>
-                <a:spcPts val="1200"/>
-              </a:spcAft>
-              <a:defRPr sz="2200">
-                <a:solidFill>
-                  <a:srgbClr val="586376"/>
-                </a:solidFill>
-              </a:defRPr>
-            </a:pPr>
-            <a:r>
-              <a:t>Tool calls visible in UI debug mode</a:t>
-            </a:r>
-          </a:p>
-          <a:p>
-            <a:pPr>
-              <a:spcAft>
-                <a:spcPts val="1200"/>
-              </a:spcAft>
-              <a:defRPr sz="2200">
-                <a:solidFill>
-                  <a:srgbClr val="586376"/>
-                </a:solidFill>
-              </a:defRPr>
-            </a:pPr>
-            <a:r>
-              <a:t>Tests mock OpenAI</a:t>
-            </a:r>
-          </a:p>
-          <a:p>
-            <a:pPr>
-              <a:spcAft>
-                <a:spcPts val="1200"/>
-              </a:spcAft>
-              <a:defRPr sz="2200">
-                <a:solidFill>
-                  <a:srgbClr val="586376"/>
-                </a:solidFill>
-              </a:defRPr>
-            </a:pPr>
-            <a:r>
-              <a:t>Scheduling tools are tested independently</a:t>
+                <a:spcPts val="700"/>
+              </a:spcAft>
+              <a:defRPr sz="2100">
+                <a:solidFill>
+                  <a:srgbClr val="586376"/>
+                </a:solidFill>
+              </a:defRPr>
+            </a:pPr>
+            <a:r>
+              <a:t>Search only returns available slots</a:t>
+            </a:r>
+          </a:p>
+          <a:p>
+            <a:pPr>
+              <a:spcAft>
+                <a:spcPts val="700"/>
+              </a:spcAft>
+              <a:defRPr sz="2100">
+                <a:solidFill>
+                  <a:srgbClr val="586376"/>
+                </a:solidFill>
+              </a:defRPr>
+            </a:pPr>
+            <a:r>
+              <a:t>Hold prevents racing users from choosing the same slot</a:t>
+            </a:r>
+          </a:p>
+          <a:p>
+            <a:pPr>
+              <a:spcAft>
+                <a:spcPts val="700"/>
+              </a:spcAft>
+              <a:defRPr sz="2100">
+                <a:solidFill>
+                  <a:srgbClr val="586376"/>
+                </a:solidFill>
+              </a:defRPr>
+            </a:pPr>
+            <a:r>
+              <a:t>Book validates patient fields and confirmation</a:t>
+            </a:r>
+          </a:p>
+          <a:p>
+            <a:pPr>
+              <a:spcAft>
+                <a:spcPts val="700"/>
+              </a:spcAft>
+              <a:defRPr sz="2100">
+                <a:solidFill>
+                  <a:srgbClr val="586376"/>
+                </a:solidFill>
+              </a:defRPr>
+            </a:pPr>
+            <a:r>
+              <a:t>Cancel validates booking and confirmation</a:t>
+            </a:r>
+          </a:p>
+          <a:p>
+            <a:pPr>
+              <a:spcAft>
+                <a:spcPts val="700"/>
+              </a:spcAft>
+              <a:defRPr sz="2100">
+                <a:solidFill>
+                  <a:srgbClr val="586376"/>
+                </a:solidFill>
+              </a:defRPr>
+            </a:pPr>
+            <a:r>
+              <a:t>Reschedule validates existing booking, new slot, and confirmation</a:t>
+            </a:r>
+          </a:p>
+          <a:p>
+            <a:pPr>
+              <a:spcAft>
+                <a:spcPts val="700"/>
+              </a:spcAft>
+              <a:defRPr sz="2100">
+                <a:solidFill>
+                  <a:srgbClr val="586376"/>
+                </a:solidFill>
+              </a:defRPr>
+            </a:pPr>
+            <a:r>
+              <a:t>Double booking is blocked by backend constraints</a:t>
             </a:r>
           </a:p>
         </p:txBody>
